--- a/docs/scripts/Md_Riaz_Final_Defense_0322310105101024.pptx
+++ b/docs/scripts/Md_Riaz_Final_Defense_0322310105101024.pptx
@@ -15905,7 +15905,7 @@
                         </a:defRPr>
                       </a:pPr>
                       <a:r>
-                        <a:t>0.96 ms</a:t>
+                        <a:t>0.89 ms</a:t>
                       </a:r>
                     </a:p>
                   </a:txBody>
@@ -15932,7 +15932,7 @@
                         </a:defRPr>
                       </a:pPr>
                       <a:r>
-                        <a:t>1.46 ms</a:t>
+                        <a:t>1.25 ms</a:t>
                       </a:r>
                     </a:p>
                   </a:txBody>
@@ -16030,7 +16030,7 @@
                         </a:defRPr>
                       </a:pPr>
                       <a:r>
-                        <a:t>0.22 ms</a:t>
+                        <a:t>0.21 ms</a:t>
                       </a:r>
                     </a:p>
                   </a:txBody>
@@ -16109,7 +16109,7 @@
                         </a:defRPr>
                       </a:pPr>
                       <a:r>
-                        <a:t>2.89 ms</a:t>
+                        <a:t>2.54 ms</a:t>
                       </a:r>
                     </a:p>
                   </a:txBody>
@@ -16136,7 +16136,7 @@
                         </a:defRPr>
                       </a:pPr>
                       <a:r>
-                        <a:t>20.41 ms</a:t>
+                        <a:t>12.87 ms</a:t>
                       </a:r>
                     </a:p>
                   </a:txBody>

--- a/docs/scripts/Md_Riaz_Final_Defense_0322310105101024.pptx
+++ b/docs/scripts/Md_Riaz_Final_Defense_0322310105101024.pptx
@@ -540,7 +540,2988 @@
           <a:lstStyle/>
           <a:p>
             <a:r>
-              <a:t>Good morning/afternoon respected chairperson and committee members. I am presenting the final defense of AEGIS, a constraint-based architecture for safe LLM-assisted natural language analytics.</a:t>
+              <a:t>শান্ত থাকুন, তাড়াহুড়ো করবেন না। শুরুর বাক্যটা:</a:t>
+            </a:r>
+          </a:p>
+          <a:p>
+            <a:r>
+              <a:t>"Good morning, respected chairperson and committee members. I am presenting the final defense of AEGIS — a constraint-based architecture for safe LLM-assisted natural language analytics."</a:t>
+            </a:r>
+          </a:p>
+          <a:p/>
+          <a:p>
+            <a:r>
+              <a:t>নাম আর সুপারভাইজারের নাম পড়ে শোনাবেন না, স্লাইডেই আছে। সরাসরি আউটলাইনে যান।</a:t>
+            </a:r>
+          </a:p>
+        </p:txBody>
+      </p:sp>
+      <p:sp>
+        <p:nvSpPr>
+          <p:cNvPr id="4" name="Slide Number Placeholder 3"/>
+          <p:cNvSpPr>
+            <a:spLocks noGrp="1"/>
+          </p:cNvSpPr>
+          <p:nvPr>
+            <p:ph type="sldNum" idx="5" sz="quarter"/>
+          </p:nvPr>
+        </p:nvSpPr>
+        <p:spPr/>
+      </p:sp>
+    </p:spTree>
+  </p:cSld>
+  <p:clrMapOvr>
+    <a:masterClrMapping/>
+  </p:clrMapOvr>
+</p:notes>
+</file>
+
+<file path=ppt/notesSlides/notesSlide10.xml><?xml version="1.0" encoding="utf-8"?>
+<p:notes xmlns:a="http://schemas.openxmlformats.org/drawingml/2006/main" xmlns:p="http://schemas.openxmlformats.org/presentationml/2006/main" xmlns:r="http://schemas.openxmlformats.org/officeDocument/2006/relationships">
+  <p:cSld>
+    <p:spTree>
+      <p:nvGrpSpPr>
+        <p:cNvPr id="1" name=""/>
+        <p:cNvGrpSpPr/>
+        <p:nvPr/>
+      </p:nvGrpSpPr>
+      <p:grpSpPr>
+        <a:xfrm>
+          <a:off x="0" y="0"/>
+          <a:ext cx="0" cy="0"/>
+          <a:chOff x="0" y="0"/>
+          <a:chExt cx="0" cy="0"/>
+        </a:xfrm>
+      </p:grpSpPr>
+      <p:sp>
+        <p:nvSpPr>
+          <p:cNvPr id="2" name="Slide Image Placeholder 1"/>
+          <p:cNvSpPr>
+            <a:spLocks noGrp="1"/>
+          </p:cNvSpPr>
+          <p:nvPr>
+            <p:ph type="sldImg" idx="2"/>
+          </p:nvPr>
+        </p:nvSpPr>
+        <p:spPr/>
+      </p:sp>
+      <p:sp>
+        <p:nvSpPr>
+          <p:cNvPr id="3" name="Notes Placeholder 2"/>
+          <p:cNvSpPr>
+            <a:spLocks noGrp="1"/>
+          </p:cNvSpPr>
+          <p:nvPr>
+            <p:ph type="body" idx="3" sz="quarter"/>
+          </p:nvPr>
+        </p:nvSpPr>
+        <p:spPr/>
+        <p:txBody>
+          <a:bodyPr/>
+          <a:lstStyle/>
+          <a:p>
+            <a:r>
+              <a:t>সাতটা ধাপ — একটা একটা করে পড়বেন না।</a:t>
+            </a:r>
+          </a:p>
+          <a:p>
+            <a:r>
+              <a:t>যেটা বলবেন: "সাতটা ধাপের মধ্যে মডেল আছে শুধু প্রথমটায়। বাকি ছয়টা সাধারণ</a:t>
+            </a:r>
+          </a:p>
+          <a:p>
+            <a:r>
+              <a:t>deterministic কোড — LLM আসার আগেও যা লেখা যেত।"</a:t>
+            </a:r>
+          </a:p>
+          <a:p>
+            <a:r>
+              <a:t>হাত দিয়ে ১ আর ২-এর মাঝের সীমাটা দেখান: "এই লাইনটা পার হয় শুধু একটা ছোট</a:t>
+            </a:r>
+          </a:p>
+          <a:p>
+            <a:r>
+              <a:t>JSON — কোনো query না, কোনো টেবিলের নাম না।" </a:t>
+            </a:r>
+          </a:p>
+        </p:txBody>
+      </p:sp>
+      <p:sp>
+        <p:nvSpPr>
+          <p:cNvPr id="4" name="Slide Number Placeholder 3"/>
+          <p:cNvSpPr>
+            <a:spLocks noGrp="1"/>
+          </p:cNvSpPr>
+          <p:nvPr>
+            <p:ph type="sldNum" idx="5" sz="quarter"/>
+          </p:nvPr>
+        </p:nvSpPr>
+        <p:spPr/>
+      </p:sp>
+    </p:spTree>
+  </p:cSld>
+  <p:clrMapOvr>
+    <a:masterClrMapping/>
+  </p:clrMapOvr>
+</p:notes>
+</file>
+
+<file path=ppt/notesSlides/notesSlide11.xml><?xml version="1.0" encoding="utf-8"?>
+<p:notes xmlns:a="http://schemas.openxmlformats.org/drawingml/2006/main" xmlns:p="http://schemas.openxmlformats.org/presentationml/2006/main" xmlns:r="http://schemas.openxmlformats.org/officeDocument/2006/relationships">
+  <p:cSld>
+    <p:spTree>
+      <p:nvGrpSpPr>
+        <p:cNvPr id="1" name=""/>
+        <p:cNvGrpSpPr/>
+        <p:nvPr/>
+      </p:nvGrpSpPr>
+      <p:grpSpPr>
+        <a:xfrm>
+          <a:off x="0" y="0"/>
+          <a:ext cx="0" cy="0"/>
+          <a:chOff x="0" y="0"/>
+          <a:chExt cx="0" cy="0"/>
+        </a:xfrm>
+      </p:grpSpPr>
+      <p:sp>
+        <p:nvSpPr>
+          <p:cNvPr id="2" name="Slide Image Placeholder 1"/>
+          <p:cNvSpPr>
+            <a:spLocks noGrp="1"/>
+          </p:cNvSpPr>
+          <p:nvPr>
+            <p:ph type="sldImg" idx="2"/>
+          </p:nvPr>
+        </p:nvSpPr>
+        <p:spPr/>
+      </p:sp>
+      <p:sp>
+        <p:nvSpPr>
+          <p:cNvPr id="3" name="Notes Placeholder 2"/>
+          <p:cNvSpPr>
+            <a:spLocks noGrp="1"/>
+          </p:cNvSpPr>
+          <p:nvPr>
+            <p:ph type="body" idx="3" sz="quarter"/>
+          </p:nvPr>
+        </p:nvSpPr>
+        <p:spPr/>
+        <p:txBody>
+          <a:bodyPr/>
+          <a:lstStyle/>
+          <a:p>
+            <a:r>
+              <a:t>এটা আপনার লেখা ফাইল — সেটাই জোর দেওয়ার জিনিস।</a:t>
+            </a:r>
+          </a:p>
+          <a:p>
+            <a:r>
+              <a:t>বলুন: "metric, dimension, join policy, output contract — সবই আমি লিখেছি,</a:t>
+            </a:r>
+          </a:p>
+          <a:p>
+            <a:r>
+              <a:t>মডেল নয়। 'revenue' মানে কী, সেই সংজ্ঞা একটাই, একটা ফাইলে।"</a:t>
+            </a:r>
+          </a:p>
+          <a:p>
+            <a:r>
+              <a:t>যোগ করুন: "এখানে না থাকলে প্রশ্নটা করাই যাবে না — আর এটাই সুবিধা,</a:t>
+            </a:r>
+          </a:p>
+          <a:p>
+            <a:r>
+              <a:t>কারণ এর ফলেই 'না' বলা বাগ না হয়ে সঠিক আচরণ হয়।" </a:t>
+            </a:r>
+          </a:p>
+        </p:txBody>
+      </p:sp>
+      <p:sp>
+        <p:nvSpPr>
+          <p:cNvPr id="4" name="Slide Number Placeholder 3"/>
+          <p:cNvSpPr>
+            <a:spLocks noGrp="1"/>
+          </p:cNvSpPr>
+          <p:nvPr>
+            <p:ph type="sldNum" idx="5" sz="quarter"/>
+          </p:nvPr>
+        </p:nvSpPr>
+        <p:spPr/>
+      </p:sp>
+    </p:spTree>
+  </p:cSld>
+  <p:clrMapOvr>
+    <a:masterClrMapping/>
+  </p:clrMapOvr>
+</p:notes>
+</file>
+
+<file path=ppt/notesSlides/notesSlide12.xml><?xml version="1.0" encoding="utf-8"?>
+<p:notes xmlns:a="http://schemas.openxmlformats.org/drawingml/2006/main" xmlns:p="http://schemas.openxmlformats.org/presentationml/2006/main" xmlns:r="http://schemas.openxmlformats.org/officeDocument/2006/relationships">
+  <p:cSld>
+    <p:spTree>
+      <p:nvGrpSpPr>
+        <p:cNvPr id="1" name=""/>
+        <p:cNvGrpSpPr/>
+        <p:nvPr/>
+      </p:nvGrpSpPr>
+      <p:grpSpPr>
+        <a:xfrm>
+          <a:off x="0" y="0"/>
+          <a:ext cx="0" cy="0"/>
+          <a:chOff x="0" y="0"/>
+          <a:chExt cx="0" cy="0"/>
+        </a:xfrm>
+      </p:grpSpPr>
+      <p:sp>
+        <p:nvSpPr>
+          <p:cNvPr id="2" name="Slide Image Placeholder 1"/>
+          <p:cNvSpPr>
+            <a:spLocks noGrp="1"/>
+          </p:cNvSpPr>
+          <p:nvPr>
+            <p:ph type="sldImg" idx="2"/>
+          </p:nvPr>
+        </p:nvSpPr>
+        <p:spPr/>
+      </p:sp>
+      <p:sp>
+        <p:nvSpPr>
+          <p:cNvPr id="3" name="Notes Placeholder 2"/>
+          <p:cNvSpPr>
+            <a:spLocks noGrp="1"/>
+          </p:cNvSpPr>
+          <p:nvPr>
+            <p:ph type="body" idx="3" sz="quarter"/>
+          </p:nvPr>
+        </p:nvSpPr>
+        <p:spPr/>
+        <p:txBody>
+          <a:bodyPr/>
+          <a:lstStyle/>
+          <a:p>
+            <a:r>
+              <a:t>তিনটা বাক্সে বাঁ থেকে ডানে যান।</a:t>
+            </a:r>
+          </a:p>
+          <a:p>
+            <a:r>
+              <a:t>"ইউজার প্রশ্ন করল। প্রম্পটে আমরা অনুমোদিত শব্দভাণ্ডার দিলাম — সেটাও</a:t>
+            </a:r>
+          </a:p>
+          <a:p>
+            <a:r>
+              <a:t>runtime-এ semantic layer থেকে বানানো। মডেল একটা JSON ফেরত দিল।"</a:t>
+            </a:r>
+          </a:p>
+          <a:p>
+            <a:r>
+              <a:t>নিচের টেবিলটাই মূল: "মডেল পারে — তালিকা থেকে id বাছতে। পারে না — SQL,</a:t>
+            </a:r>
+          </a:p>
+          <a:p>
+            <a:r>
+              <a:t>join, টেবিলের নাম, কোনো লেখার কাজ।"</a:t>
+            </a:r>
+          </a:p>
+          <a:p>
+            <a:r>
+              <a:t>শেষ বাক্য: "সে টেবিলের নামই দেখে না।" </a:t>
+            </a:r>
+          </a:p>
+        </p:txBody>
+      </p:sp>
+      <p:sp>
+        <p:nvSpPr>
+          <p:cNvPr id="4" name="Slide Number Placeholder 3"/>
+          <p:cNvSpPr>
+            <a:spLocks noGrp="1"/>
+          </p:cNvSpPr>
+          <p:nvPr>
+            <p:ph type="sldNum" idx="5" sz="quarter"/>
+          </p:nvPr>
+        </p:nvSpPr>
+        <p:spPr/>
+      </p:sp>
+    </p:spTree>
+  </p:cSld>
+  <p:clrMapOvr>
+    <a:masterClrMapping/>
+  </p:clrMapOvr>
+</p:notes>
+</file>
+
+<file path=ppt/notesSlides/notesSlide13.xml><?xml version="1.0" encoding="utf-8"?>
+<p:notes xmlns:a="http://schemas.openxmlformats.org/drawingml/2006/main" xmlns:p="http://schemas.openxmlformats.org/presentationml/2006/main" xmlns:r="http://schemas.openxmlformats.org/officeDocument/2006/relationships">
+  <p:cSld>
+    <p:spTree>
+      <p:nvGrpSpPr>
+        <p:cNvPr id="1" name=""/>
+        <p:cNvGrpSpPr/>
+        <p:nvPr/>
+      </p:nvGrpSpPr>
+      <p:grpSpPr>
+        <a:xfrm>
+          <a:off x="0" y="0"/>
+          <a:ext cx="0" cy="0"/>
+          <a:chOff x="0" y="0"/>
+          <a:chExt cx="0" cy="0"/>
+        </a:xfrm>
+      </p:grpSpPr>
+      <p:sp>
+        <p:nvSpPr>
+          <p:cNvPr id="2" name="Slide Image Placeholder 1"/>
+          <p:cNvSpPr>
+            <a:spLocks noGrp="1"/>
+          </p:cNvSpPr>
+          <p:nvPr>
+            <p:ph type="sldImg" idx="2"/>
+          </p:nvPr>
+        </p:nvSpPr>
+        <p:spPr/>
+      </p:sp>
+      <p:sp>
+        <p:nvSpPr>
+          <p:cNvPr id="3" name="Notes Placeholder 2"/>
+          <p:cNvSpPr>
+            <a:spLocks noGrp="1"/>
+          </p:cNvSpPr>
+          <p:nvPr>
+            <p:ph type="body" idx="3" sz="quarter"/>
+          </p:nvPr>
+        </p:nvSpPr>
+        <p:spPr/>
+        <p:txBody>
+          <a:bodyPr/>
+          <a:lstStyle/>
+          <a:p>
+            <a:r>
+              <a:t>কোডটা দেখান, আর শেষ কমেন্ট লাইনে আঙুল রাখুন।</a:t>
+            </a:r>
+          </a:p>
+          <a:p>
+            <a:r>
+              <a:t>বলুন: "এই টাইপে কোনো sql ফিল্ড নেই। শুধু যে আমরা লিখিনি তা নয় — টাইপটা</a:t>
+            </a:r>
+          </a:p>
+          <a:p>
+            <a:r>
+              <a:t>ওটা প্রকাশই করতে পারে না।"</a:t>
+            </a:r>
+          </a:p>
+          <a:p>
+            <a:r>
+              <a:t>confidence ফিল্ডটা দেখিয়ে: "ডিফল্ট LOW। অনুপস্থিতি মানে আত্মবিশ্বাস নয়।"</a:t>
+            </a:r>
+          </a:p>
+          <a:p>
+            <a:r>
+              <a:t>নিচের টেবিল: "intent_class ঠিক করে কোন compiler path যাবে — এগারোটা</a:t>
+            </a:r>
+          </a:p>
+          <a:p>
+            <a:r>
+              <a:t>নির্দিষ্ট আকৃতি, প্রশ্ন অনুযায়ী বানানো নয়।"</a:t>
+            </a:r>
+          </a:p>
+          <a:p>
+            <a:r>
+              <a:t>শেষে: "semantic layer যে id চেনে না, সেটা এখানেই বাতিল — কোনো SQL তৈরির আগেই।" </a:t>
+            </a:r>
+          </a:p>
+        </p:txBody>
+      </p:sp>
+      <p:sp>
+        <p:nvSpPr>
+          <p:cNvPr id="4" name="Slide Number Placeholder 3"/>
+          <p:cNvSpPr>
+            <a:spLocks noGrp="1"/>
+          </p:cNvSpPr>
+          <p:nvPr>
+            <p:ph type="sldNum" idx="5" sz="quarter"/>
+          </p:nvPr>
+        </p:nvSpPr>
+        <p:spPr/>
+      </p:sp>
+    </p:spTree>
+  </p:cSld>
+  <p:clrMapOvr>
+    <a:masterClrMapping/>
+  </p:clrMapOvr>
+</p:notes>
+</file>
+
+<file path=ppt/notesSlides/notesSlide14.xml><?xml version="1.0" encoding="utf-8"?>
+<p:notes xmlns:a="http://schemas.openxmlformats.org/drawingml/2006/main" xmlns:p="http://schemas.openxmlformats.org/presentationml/2006/main" xmlns:r="http://schemas.openxmlformats.org/officeDocument/2006/relationships">
+  <p:cSld>
+    <p:spTree>
+      <p:nvGrpSpPr>
+        <p:cNvPr id="1" name=""/>
+        <p:cNvGrpSpPr/>
+        <p:nvPr/>
+      </p:nvGrpSpPr>
+      <p:grpSpPr>
+        <a:xfrm>
+          <a:off x="0" y="0"/>
+          <a:ext cx="0" cy="0"/>
+          <a:chOff x="0" y="0"/>
+          <a:chExt cx="0" cy="0"/>
+        </a:xfrm>
+      </p:grpSpPr>
+      <p:sp>
+        <p:nvSpPr>
+          <p:cNvPr id="2" name="Slide Image Placeholder 1"/>
+          <p:cNvSpPr>
+            <a:spLocks noGrp="1"/>
+          </p:cNvSpPr>
+          <p:nvPr>
+            <p:ph type="sldImg" idx="2"/>
+          </p:nvPr>
+        </p:nvSpPr>
+        <p:spPr/>
+      </p:sp>
+      <p:sp>
+        <p:nvSpPr>
+          <p:cNvPr id="3" name="Notes Placeholder 2"/>
+          <p:cNvSpPr>
+            <a:spLocks noGrp="1"/>
+          </p:cNvSpPr>
+          <p:nvPr>
+            <p:ph type="body" idx="3" sz="quarter"/>
+          </p:nvPr>
+        </p:nvSpPr>
+        <p:spPr/>
+        <p:txBody>
+          <a:bodyPr/>
+          <a:lstStyle/>
+          <a:p>
+            <a:r>
+              <a:t>টেবিলের 'SQL expression' কলামটাই দেখার জিনিস।</a:t>
+            </a:r>
+          </a:p>
+          <a:p>
+            <a:r>
+              <a:t>বলুন: "মডেল বলেছে avg_order_value। ওই নামের পেছনের সংজ্ঞাটা —</a:t>
+            </a:r>
+          </a:p>
+          <a:p>
+            <a:r>
+              <a:t>AVG(COALESCE(o.OrderTotal, 0)) — প্রশাসক লিখেছেন, মডেল নয়।"</a:t>
+            </a:r>
+          </a:p>
+          <a:p>
+            <a:r>
+              <a:t>তৃতীয় সারিটা আলাদা করে দেখান: "o.Deleted = 0 কেউ চায়নি। এটা সংজ্ঞার</a:t>
+            </a:r>
+          </a:p>
+          <a:p>
+            <a:r>
+              <a:t>অবিচ্ছেদ্য অংশ, তাই সবসময় বসে।"</a:t>
+            </a:r>
+          </a:p>
+          <a:p>
+            <a:r>
+              <a:t>শেষে পার্থক্যটা বলুন: "Intent Object হলো মডেল যা বলেছে। Analysis Plan হলো</a:t>
+            </a:r>
+          </a:p>
+          <a:p>
+            <a:r>
+              <a:t>AEGIS যা বাঁধতে পেরেছে।" </a:t>
+            </a:r>
+          </a:p>
+        </p:txBody>
+      </p:sp>
+      <p:sp>
+        <p:nvSpPr>
+          <p:cNvPr id="4" name="Slide Number Placeholder 3"/>
+          <p:cNvSpPr>
+            <a:spLocks noGrp="1"/>
+          </p:cNvSpPr>
+          <p:nvPr>
+            <p:ph type="sldNum" idx="5" sz="quarter"/>
+          </p:nvPr>
+        </p:nvSpPr>
+        <p:spPr/>
+      </p:sp>
+    </p:spTree>
+  </p:cSld>
+  <p:clrMapOvr>
+    <a:masterClrMapping/>
+  </p:clrMapOvr>
+</p:notes>
+</file>
+
+<file path=ppt/notesSlides/notesSlide15.xml><?xml version="1.0" encoding="utf-8"?>
+<p:notes xmlns:a="http://schemas.openxmlformats.org/drawingml/2006/main" xmlns:p="http://schemas.openxmlformats.org/presentationml/2006/main" xmlns:r="http://schemas.openxmlformats.org/officeDocument/2006/relationships">
+  <p:cSld>
+    <p:spTree>
+      <p:nvGrpSpPr>
+        <p:cNvPr id="1" name=""/>
+        <p:cNvGrpSpPr/>
+        <p:nvPr/>
+      </p:nvGrpSpPr>
+      <p:grpSpPr>
+        <a:xfrm>
+          <a:off x="0" y="0"/>
+          <a:ext cx="0" cy="0"/>
+          <a:chOff x="0" y="0"/>
+          <a:chExt cx="0" cy="0"/>
+        </a:xfrm>
+      </p:grpSpPr>
+      <p:sp>
+        <p:nvSpPr>
+          <p:cNvPr id="2" name="Slide Image Placeholder 1"/>
+          <p:cNvSpPr>
+            <a:spLocks noGrp="1"/>
+          </p:cNvSpPr>
+          <p:nvPr>
+            <p:ph type="sldImg" idx="2"/>
+          </p:nvPr>
+        </p:nvSpPr>
+        <p:spPr/>
+      </p:sp>
+      <p:sp>
+        <p:nvSpPr>
+          <p:cNvPr id="3" name="Notes Placeholder 2"/>
+          <p:cNvSpPr>
+            <a:spLocks noGrp="1"/>
+          </p:cNvSpPr>
+          <p:nvPr>
+            <p:ph type="body" idx="3" sz="quarter"/>
+          </p:nvPr>
+        </p:nvSpPr>
+        <p:spPr/>
+        <p:txBody>
+          <a:bodyPr/>
+          <a:lstStyle/>
+          <a:p>
+            <a:r>
+              <a:t>বাঁ দিকের টেমপ্লেটে আঙুল রেখে শুরু করুন।</a:t>
+            </a:r>
+          </a:p>
+          <a:p>
+            <a:r>
+              <a:t>"query-র আকৃতি আগে থেকে ঠিক করা। শুধু ফাঁকা জায়গাগুলো পূরণ হয়।"</a:t>
+            </a:r>
+          </a:p>
+          <a:p>
+            <a:r>
+              <a:t>মাঝখানে: "কী দিয়ে পূরণ হয় — semantic layer-এর অনুমোদিত expression দিয়ে।"</a:t>
+            </a:r>
+          </a:p>
+          <a:p>
+            <a:r>
+              <a:t>ডানে: "ফল — একটা read-only SELECT।"</a:t>
+            </a:r>
+          </a:p>
+          <a:p>
+            <a:r>
+              <a:t>সবচেয়ে জরুরি বাক্যটা শেষে: "ইউজারের লেখা কোনো টেক্সট কখনো query-র</a:t>
+            </a:r>
+          </a:p>
+          <a:p>
+            <a:r>
+              <a:t>কাঠামোর সাথে জোড়া লাগে না।" এটাই নিরাপত্তার যুক্তি।</a:t>
+            </a:r>
+          </a:p>
+        </p:txBody>
+      </p:sp>
+      <p:sp>
+        <p:nvSpPr>
+          <p:cNvPr id="4" name="Slide Number Placeholder 3"/>
+          <p:cNvSpPr>
+            <a:spLocks noGrp="1"/>
+          </p:cNvSpPr>
+          <p:nvPr>
+            <p:ph type="sldNum" idx="5" sz="quarter"/>
+          </p:nvPr>
+        </p:nvSpPr>
+        <p:spPr/>
+      </p:sp>
+    </p:spTree>
+  </p:cSld>
+  <p:clrMapOvr>
+    <a:masterClrMapping/>
+  </p:clrMapOvr>
+</p:notes>
+</file>
+
+<file path=ppt/notesSlides/notesSlide16.xml><?xml version="1.0" encoding="utf-8"?>
+<p:notes xmlns:a="http://schemas.openxmlformats.org/drawingml/2006/main" xmlns:p="http://schemas.openxmlformats.org/presentationml/2006/main" xmlns:r="http://schemas.openxmlformats.org/officeDocument/2006/relationships">
+  <p:cSld>
+    <p:spTree>
+      <p:nvGrpSpPr>
+        <p:cNvPr id="1" name=""/>
+        <p:cNvGrpSpPr/>
+        <p:nvPr/>
+      </p:nvGrpSpPr>
+      <p:grpSpPr>
+        <a:xfrm>
+          <a:off x="0" y="0"/>
+          <a:ext cx="0" cy="0"/>
+          <a:chOff x="0" y="0"/>
+          <a:chExt cx="0" cy="0"/>
+        </a:xfrm>
+      </p:grpSpPr>
+      <p:sp>
+        <p:nvSpPr>
+          <p:cNvPr id="2" name="Slide Image Placeholder 1"/>
+          <p:cNvSpPr>
+            <a:spLocks noGrp="1"/>
+          </p:cNvSpPr>
+          <p:nvPr>
+            <p:ph type="sldImg" idx="2"/>
+          </p:nvPr>
+        </p:nvSpPr>
+        <p:spPr/>
+      </p:sp>
+      <p:sp>
+        <p:nvSpPr>
+          <p:cNvPr id="3" name="Notes Placeholder 2"/>
+          <p:cNvSpPr>
+            <a:spLocks noGrp="1"/>
+          </p:cNvSpPr>
+          <p:nvPr>
+            <p:ph type="body" idx="3" sz="quarter"/>
+          </p:nvPr>
+        </p:nvSpPr>
+        <p:spPr/>
+        <p:txBody>
+          <a:bodyPr/>
+          <a:lstStyle/>
+          <a:p>
+            <a:r>
+              <a:t>এই স্লাইডটা সন্দেহ দূর করার জন্য — ধীরে যান।</a:t>
+            </a:r>
+          </a:p>
+          <a:p>
+            <a:r>
+              <a:t>"কেউ ভাবতে পারেন সহজ প্রশ্নেই এটা কাজ করে। তাই এমন একটা নিলাম যেটায়</a:t>
+            </a:r>
+          </a:p>
+          <a:p>
+            <a:r>
+              <a:t>চারটা টেবিল জোড়া লাগে।"</a:t>
+            </a:r>
+          </a:p>
+          <a:p>
+            <a:r>
+              <a:t>মডেলের JSON দেখান: "মডেল দিয়েছে শুধু দুটো নাম। কোনো join বলেনি।"</a:t>
+            </a:r>
+          </a:p>
+          <a:p>
+            <a:r>
+              <a:t>join path দেখিয়ে: "পথটা BFS বের করেছে আমার ঘোষিত join graph থেকে।"</a:t>
+            </a:r>
+          </a:p>
+          <a:p>
+            <a:r>
+              <a:t>নিচের দুই সারি ভুলবেন না — এ দুটোই সবচেয়ে বেশি মনে থাকবে:</a:t>
+            </a:r>
+          </a:p>
+          <a:p>
+            <a:r>
+              <a:t>"stock less than 10" — সংখ্যাটা bound parameter, query-তে পেস্ট হয়নি।</a:t>
+            </a:r>
+          </a:p>
+          <a:p>
+            <a:r>
+              <a:t>"revenue from Google Ads" — না বলেছে, কারণ traffic_source মডেল করা নেই।</a:t>
+            </a:r>
+          </a:p>
+          <a:p>
+            <a:r>
+              <a:t>কাছাকাছি কিছু ধরে নেয়নি।</a:t>
+            </a:r>
+          </a:p>
+        </p:txBody>
+      </p:sp>
+      <p:sp>
+        <p:nvSpPr>
+          <p:cNvPr id="4" name="Slide Number Placeholder 3"/>
+          <p:cNvSpPr>
+            <a:spLocks noGrp="1"/>
+          </p:cNvSpPr>
+          <p:nvPr>
+            <p:ph type="sldNum" idx="5" sz="quarter"/>
+          </p:nvPr>
+        </p:nvSpPr>
+        <p:spPr/>
+      </p:sp>
+    </p:spTree>
+  </p:cSld>
+  <p:clrMapOvr>
+    <a:masterClrMapping/>
+  </p:clrMapOvr>
+</p:notes>
+</file>
+
+<file path=ppt/notesSlides/notesSlide17.xml><?xml version="1.0" encoding="utf-8"?>
+<p:notes xmlns:a="http://schemas.openxmlformats.org/drawingml/2006/main" xmlns:p="http://schemas.openxmlformats.org/presentationml/2006/main" xmlns:r="http://schemas.openxmlformats.org/officeDocument/2006/relationships">
+  <p:cSld>
+    <p:spTree>
+      <p:nvGrpSpPr>
+        <p:cNvPr id="1" name=""/>
+        <p:cNvGrpSpPr/>
+        <p:nvPr/>
+      </p:nvGrpSpPr>
+      <p:grpSpPr>
+        <a:xfrm>
+          <a:off x="0" y="0"/>
+          <a:ext cx="0" cy="0"/>
+          <a:chOff x="0" y="0"/>
+          <a:chExt cx="0" cy="0"/>
+        </a:xfrm>
+      </p:grpSpPr>
+      <p:sp>
+        <p:nvSpPr>
+          <p:cNvPr id="2" name="Slide Image Placeholder 1"/>
+          <p:cNvSpPr>
+            <a:spLocks noGrp="1"/>
+          </p:cNvSpPr>
+          <p:nvPr>
+            <p:ph type="sldImg" idx="2"/>
+          </p:nvPr>
+        </p:nvSpPr>
+        <p:spPr/>
+      </p:sp>
+      <p:sp>
+        <p:nvSpPr>
+          <p:cNvPr id="3" name="Notes Placeholder 2"/>
+          <p:cNvSpPr>
+            <a:spLocks noGrp="1"/>
+          </p:cNvSpPr>
+          <p:nvPr>
+            <p:ph type="body" idx="3" sz="quarter"/>
+          </p:nvPr>
+        </p:nvSpPr>
+        <p:spPr/>
+        <p:txBody>
+          <a:bodyPr/>
+          <a:lstStyle/>
+          <a:p>
+            <a:r>
+              <a:t>সংক্ষেপে — এটা হালকা স্লাইড।</a:t>
+            </a:r>
+          </a:p>
+          <a:p>
+            <a:r>
+              <a:t>"আউটপুটের ধরন ঠিক হয় result-এর আকৃতি থেকে, মডেলের বর্ণনা থেকে নয়।</a:t>
+            </a:r>
+          </a:p>
+          <a:p>
+            <a:r>
+              <a:t>একটা সংখ্যা হলে KPI, সারি হলে টেবিল, সময় হলে চার্ট।"</a:t>
+            </a:r>
+          </a:p>
+          <a:p>
+            <a:r>
+              <a:t>শেষ বাক্যে মূল্য যোগ করুন: "আর প্রোটোটাইপ শুধু উত্তর দেখায় না —</a:t>
+            </a:r>
+          </a:p>
+          <a:p>
+            <a:r>
+              <a:t>কোন পথে উত্তরটা এলো সেটাও দেখায়।" </a:t>
+            </a:r>
+          </a:p>
+        </p:txBody>
+      </p:sp>
+      <p:sp>
+        <p:nvSpPr>
+          <p:cNvPr id="4" name="Slide Number Placeholder 3"/>
+          <p:cNvSpPr>
+            <a:spLocks noGrp="1"/>
+          </p:cNvSpPr>
+          <p:nvPr>
+            <p:ph type="sldNum" idx="5" sz="quarter"/>
+          </p:nvPr>
+        </p:nvSpPr>
+        <p:spPr/>
+      </p:sp>
+    </p:spTree>
+  </p:cSld>
+  <p:clrMapOvr>
+    <a:masterClrMapping/>
+  </p:clrMapOvr>
+</p:notes>
+</file>
+
+<file path=ppt/notesSlides/notesSlide18.xml><?xml version="1.0" encoding="utf-8"?>
+<p:notes xmlns:a="http://schemas.openxmlformats.org/drawingml/2006/main" xmlns:p="http://schemas.openxmlformats.org/presentationml/2006/main" xmlns:r="http://schemas.openxmlformats.org/officeDocument/2006/relationships">
+  <p:cSld>
+    <p:spTree>
+      <p:nvGrpSpPr>
+        <p:cNvPr id="1" name=""/>
+        <p:cNvGrpSpPr/>
+        <p:nvPr/>
+      </p:nvGrpSpPr>
+      <p:grpSpPr>
+        <a:xfrm>
+          <a:off x="0" y="0"/>
+          <a:ext cx="0" cy="0"/>
+          <a:chOff x="0" y="0"/>
+          <a:chExt cx="0" cy="0"/>
+        </a:xfrm>
+      </p:grpSpPr>
+      <p:sp>
+        <p:nvSpPr>
+          <p:cNvPr id="2" name="Slide Image Placeholder 1"/>
+          <p:cNvSpPr>
+            <a:spLocks noGrp="1"/>
+          </p:cNvSpPr>
+          <p:nvPr>
+            <p:ph type="sldImg" idx="2"/>
+          </p:nvPr>
+        </p:nvSpPr>
+        <p:spPr/>
+      </p:sp>
+      <p:sp>
+        <p:nvSpPr>
+          <p:cNvPr id="3" name="Notes Placeholder 2"/>
+          <p:cNvSpPr>
+            <a:spLocks noGrp="1"/>
+          </p:cNvSpPr>
+          <p:nvPr>
+            <p:ph type="body" idx="3" sz="quarter"/>
+          </p:nvPr>
+        </p:nvSpPr>
+        <p:spPr/>
+        <p:txBody>
+          <a:bodyPr/>
+          <a:lstStyle/>
+          <a:p>
+            <a:r>
+              <a:t>স্ট্যাকটা দ্রুত বলুন, সংখ্যাগুলোয় থামুন।</a:t>
+            </a:r>
+          </a:p>
+          <a:p>
+            <a:r>
+              <a:t>"FastAPI, MySQL, OpenAI-compatible API, আর semantic-layer ফাইল।"</a:t>
+            </a:r>
+          </a:p>
+          <a:p>
+            <a:r>
+              <a:t>সিড ডেটার সংখ্যাগুলো নিজে থেকে বলুন — ২,৫০০ অর্ডার, ৬,৩২০ order item,</a:t>
+            </a:r>
+          </a:p>
+          <a:p>
+            <a:r>
+              <a:t>১,২০০ কাস্টমার, ১৭টা প্রোডাক্ট।</a:t>
+            </a:r>
+          </a:p>
+          <a:p>
+            <a:r>
+              <a:t>১৭ সংখ্যাটা নিজেই তুলে ধরুন: "ক্যাটালগটা ছোট — এটা limitations-এ ফিরে আসবে।"</a:t>
+            </a:r>
+          </a:p>
+          <a:p>
+            <a:r>
+              <a:t>আগে বললে পরে দুর্বলতা মনে হয় না।</a:t>
+            </a:r>
+          </a:p>
+        </p:txBody>
+      </p:sp>
+      <p:sp>
+        <p:nvSpPr>
+          <p:cNvPr id="4" name="Slide Number Placeholder 3"/>
+          <p:cNvSpPr>
+            <a:spLocks noGrp="1"/>
+          </p:cNvSpPr>
+          <p:nvPr>
+            <p:ph type="sldNum" idx="5" sz="quarter"/>
+          </p:nvPr>
+        </p:nvSpPr>
+        <p:spPr/>
+      </p:sp>
+    </p:spTree>
+  </p:cSld>
+  <p:clrMapOvr>
+    <a:masterClrMapping/>
+  </p:clrMapOvr>
+</p:notes>
+</file>
+
+<file path=ppt/notesSlides/notesSlide19.xml><?xml version="1.0" encoding="utf-8"?>
+<p:notes xmlns:a="http://schemas.openxmlformats.org/drawingml/2006/main" xmlns:p="http://schemas.openxmlformats.org/presentationml/2006/main" xmlns:r="http://schemas.openxmlformats.org/officeDocument/2006/relationships">
+  <p:cSld>
+    <p:spTree>
+      <p:nvGrpSpPr>
+        <p:cNvPr id="1" name=""/>
+        <p:cNvGrpSpPr/>
+        <p:nvPr/>
+      </p:nvGrpSpPr>
+      <p:grpSpPr>
+        <a:xfrm>
+          <a:off x="0" y="0"/>
+          <a:ext cx="0" cy="0"/>
+          <a:chOff x="0" y="0"/>
+          <a:chExt cx="0" cy="0"/>
+        </a:xfrm>
+      </p:grpSpPr>
+      <p:sp>
+        <p:nvSpPr>
+          <p:cNvPr id="2" name="Slide Image Placeholder 1"/>
+          <p:cNvSpPr>
+            <a:spLocks noGrp="1"/>
+          </p:cNvSpPr>
+          <p:nvPr>
+            <p:ph type="sldImg" idx="2"/>
+          </p:nvPr>
+        </p:nvSpPr>
+        <p:spPr/>
+      </p:sp>
+      <p:sp>
+        <p:nvSpPr>
+          <p:cNvPr id="3" name="Notes Placeholder 2"/>
+          <p:cNvSpPr>
+            <a:spLocks noGrp="1"/>
+          </p:cNvSpPr>
+          <p:nvPr>
+            <p:ph type="body" idx="3" sz="quarter"/>
+          </p:nvPr>
+        </p:nvSpPr>
+        <p:spPr/>
+        <p:txBody>
+          <a:bodyPr/>
+          <a:lstStyle/>
+          <a:p>
+            <a:r>
+              <a:t>শুরুতেই বাঁ কলামের সীমা বলুন — ধরা পড়ার অপেক্ষা করবেন না।</a:t>
+            </a:r>
+          </a:p>
+          <a:p>
+            <a:r>
+              <a:t>"বাঁ কলামে কোনো মডেল নেই। committed intent annotation সরাসরি mapper-এ</a:t>
+            </a:r>
+          </a:p>
+          <a:p>
+            <a:r>
+              <a:t>দেওয়া। ওটা end-to-end ফল নয়, ওটা compiler-এর regression gate।</a:t>
+            </a:r>
+          </a:p>
+          <a:p>
+            <a:r>
+              <a:t>ডান কলামটাই আসল সিস্টেম।"</a:t>
+            </a:r>
+          </a:p>
+          <a:p>
+            <a:r>
+              <a:t>তারপর দুটো সংখ্যা একসাথে বলুন, কখনো আলাদা নয়:</a:t>
+            </a:r>
+          </a:p>
+          <a:p>
+            <a:r>
+              <a:t>"৪২৩/৪২৫ উত্তর দিয়েছে, আর ৭২/৭৫ না বলেছে।"</a:t>
+            </a:r>
+          </a:p>
+          <a:p>
+            <a:r>
+              <a:t>কেন একসাথে: "সব প্রশ্নে না বললে রিজেকশনে ১০০% পাওয়া যায়।</a:t>
+            </a:r>
+          </a:p>
+          <a:p>
+            <a:r>
+              <a:t>৯৯.৫% উত্তরের হারটাই ৯৬%-কে অর্থ দেয়।"</a:t>
+            </a:r>
+          </a:p>
+          <a:p>
+            <a:r>
+              <a:t>৭৩.৬% নিজে থেকে ব্যাখ্যা করুন: "এটা সবচেয়ে কড়া মাপ — সাতটা slot হুবহু</a:t>
+            </a:r>
+          </a:p>
+          <a:p>
+            <a:r>
+              <a:t>মিলতে হবে। grounding fuzzy matching, তাই আচরণে ৯৯.৫%।" </a:t>
+            </a:r>
+          </a:p>
+        </p:txBody>
+      </p:sp>
+      <p:sp>
+        <p:nvSpPr>
+          <p:cNvPr id="4" name="Slide Number Placeholder 3"/>
+          <p:cNvSpPr>
+            <a:spLocks noGrp="1"/>
+          </p:cNvSpPr>
+          <p:nvPr>
+            <p:ph type="sldNum" idx="5" sz="quarter"/>
+          </p:nvPr>
+        </p:nvSpPr>
+        <p:spPr/>
+      </p:sp>
+    </p:spTree>
+  </p:cSld>
+  <p:clrMapOvr>
+    <a:masterClrMapping/>
+  </p:clrMapOvr>
+</p:notes>
+</file>
+
+<file path=ppt/notesSlides/notesSlide2.xml><?xml version="1.0" encoding="utf-8"?>
+<p:notes xmlns:a="http://schemas.openxmlformats.org/drawingml/2006/main" xmlns:p="http://schemas.openxmlformats.org/presentationml/2006/main" xmlns:r="http://schemas.openxmlformats.org/officeDocument/2006/relationships">
+  <p:cSld>
+    <p:spTree>
+      <p:nvGrpSpPr>
+        <p:cNvPr id="1" name=""/>
+        <p:cNvGrpSpPr/>
+        <p:nvPr/>
+      </p:nvGrpSpPr>
+      <p:grpSpPr>
+        <a:xfrm>
+          <a:off x="0" y="0"/>
+          <a:ext cx="0" cy="0"/>
+          <a:chOff x="0" y="0"/>
+          <a:chExt cx="0" cy="0"/>
+        </a:xfrm>
+      </p:grpSpPr>
+      <p:sp>
+        <p:nvSpPr>
+          <p:cNvPr id="2" name="Slide Image Placeholder 1"/>
+          <p:cNvSpPr>
+            <a:spLocks noGrp="1"/>
+          </p:cNvSpPr>
+          <p:nvPr>
+            <p:ph type="sldImg" idx="2"/>
+          </p:nvPr>
+        </p:nvSpPr>
+        <p:spPr/>
+      </p:sp>
+      <p:sp>
+        <p:nvSpPr>
+          <p:cNvPr id="3" name="Notes Placeholder 2"/>
+          <p:cNvSpPr>
+            <a:spLocks noGrp="1"/>
+          </p:cNvSpPr>
+          <p:nvPr>
+            <p:ph type="body" idx="3" sz="quarter"/>
+          </p:nvPr>
+        </p:nvSpPr>
+        <p:spPr/>
+        <p:txBody>
+          <a:bodyPr/>
+          <a:lstStyle/>
+          <a:p>
+            <a:r>
+              <a:t>আউটলাইনটা পড়ে শোনাবেন না — এক নজর বুলিয়ে নিন।</a:t>
+            </a:r>
+          </a:p>
+          <a:p>
+            <a:r>
+              <a:t>বলুন: "আজ তিনটা জিনিস দেখাব — সমস্যাটা কী, আমার আর্কিটেকচার কীভাবে সেটা সরায়,</a:t>
+            </a:r>
+          </a:p>
+          <a:p>
+            <a:r>
+              <a:t>আর আমি কীভাবে মেপে দেখিয়েছি যে কাজ করে।"</a:t>
+            </a:r>
+          </a:p>
+          <a:p>
+            <a:r>
+              <a:t>তারপর সরাসরি পরের স্লাইডে যান।</a:t>
+            </a:r>
+          </a:p>
+        </p:txBody>
+      </p:sp>
+      <p:sp>
+        <p:nvSpPr>
+          <p:cNvPr id="4" name="Slide Number Placeholder 3"/>
+          <p:cNvSpPr>
+            <a:spLocks noGrp="1"/>
+          </p:cNvSpPr>
+          <p:nvPr>
+            <p:ph type="sldNum" idx="5" sz="quarter"/>
+          </p:nvPr>
+        </p:nvSpPr>
+        <p:spPr/>
+      </p:sp>
+    </p:spTree>
+  </p:cSld>
+  <p:clrMapOvr>
+    <a:masterClrMapping/>
+  </p:clrMapOvr>
+</p:notes>
+</file>
+
+<file path=ppt/notesSlides/notesSlide20.xml><?xml version="1.0" encoding="utf-8"?>
+<p:notes xmlns:a="http://schemas.openxmlformats.org/drawingml/2006/main" xmlns:p="http://schemas.openxmlformats.org/presentationml/2006/main" xmlns:r="http://schemas.openxmlformats.org/officeDocument/2006/relationships">
+  <p:cSld>
+    <p:spTree>
+      <p:nvGrpSpPr>
+        <p:cNvPr id="1" name=""/>
+        <p:cNvGrpSpPr/>
+        <p:nvPr/>
+      </p:nvGrpSpPr>
+      <p:grpSpPr>
+        <a:xfrm>
+          <a:off x="0" y="0"/>
+          <a:ext cx="0" cy="0"/>
+          <a:chOff x="0" y="0"/>
+          <a:chExt cx="0" cy="0"/>
+        </a:xfrm>
+      </p:grpSpPr>
+      <p:sp>
+        <p:nvSpPr>
+          <p:cNvPr id="2" name="Slide Image Placeholder 1"/>
+          <p:cNvSpPr>
+            <a:spLocks noGrp="1"/>
+          </p:cNvSpPr>
+          <p:nvPr>
+            <p:ph type="sldImg" idx="2"/>
+          </p:nvPr>
+        </p:nvSpPr>
+        <p:spPr/>
+      </p:sp>
+      <p:sp>
+        <p:nvSpPr>
+          <p:cNvPr id="3" name="Notes Placeholder 2"/>
+          <p:cNvSpPr>
+            <a:spLocks noGrp="1"/>
+          </p:cNvSpPr>
+          <p:nvPr>
+            <p:ph type="body" idx="3" sz="quarter"/>
+          </p:nvPr>
+        </p:nvSpPr>
+        <p:spPr/>
+        <p:txBody>
+          <a:bodyPr/>
+          <a:lstStyle/>
+          <a:p>
+            <a:r>
+              <a:t>এক বাক্যে সারসংক্ষেপ, তারপর থামুন।</a:t>
+            </a:r>
+          </a:p>
+          <a:p>
+            <a:r>
+              <a:t>"পুরো সময়টাই মডেলের বাক্য পড়া। আমার বানানো সবকিছু ৩.৬ মিলিসেকেন্ড।"</a:t>
+            </a:r>
+          </a:p>
+          <a:p>
+            <a:r>
+              <a:t>৯ সেকেন্ড শুনে কেউ যেন ধীর না ভাবেন — সেটা আগেই সামলান:</a:t>
+            </a:r>
+          </a:p>
+          <a:p>
+            <a:r>
+              <a:t>"ওই ৯ সেকেন্ড gateway-র সম্পত্তি, আর্কিটেকচারের নয়। প্রোভাইডার বদলালে</a:t>
+            </a:r>
+          </a:p>
+          <a:p>
+            <a:r>
+              <a:t>বদলাবে। ৩.৬ ms আর্কিটেকচারের — যেকোনো deployment-এ যাবে।"</a:t>
+            </a:r>
+          </a:p>
+          <a:p>
+            <a:r>
+              <a:t>আর ব্যবহারিক ফলটা বলুন: "সেভ করা widget refresh করলে মডেল লাগে না,</a:t>
+            </a:r>
+          </a:p>
+          <a:p>
+            <a:r>
+              <a:t>তাই ওটা কার্যত সাথে সাথে।" </a:t>
+            </a:r>
+          </a:p>
+        </p:txBody>
+      </p:sp>
+      <p:sp>
+        <p:nvSpPr>
+          <p:cNvPr id="4" name="Slide Number Placeholder 3"/>
+          <p:cNvSpPr>
+            <a:spLocks noGrp="1"/>
+          </p:cNvSpPr>
+          <p:nvPr>
+            <p:ph type="sldNum" idx="5" sz="quarter"/>
+          </p:nvPr>
+        </p:nvSpPr>
+        <p:spPr/>
+      </p:sp>
+    </p:spTree>
+  </p:cSld>
+  <p:clrMapOvr>
+    <a:masterClrMapping/>
+  </p:clrMapOvr>
+</p:notes>
+</file>
+
+<file path=ppt/notesSlides/notesSlide21.xml><?xml version="1.0" encoding="utf-8"?>
+<p:notes xmlns:a="http://schemas.openxmlformats.org/drawingml/2006/main" xmlns:p="http://schemas.openxmlformats.org/presentationml/2006/main" xmlns:r="http://schemas.openxmlformats.org/officeDocument/2006/relationships">
+  <p:cSld>
+    <p:spTree>
+      <p:nvGrpSpPr>
+        <p:cNvPr id="1" name=""/>
+        <p:cNvGrpSpPr/>
+        <p:nvPr/>
+      </p:nvGrpSpPr>
+      <p:grpSpPr>
+        <a:xfrm>
+          <a:off x="0" y="0"/>
+          <a:ext cx="0" cy="0"/>
+          <a:chOff x="0" y="0"/>
+          <a:chExt cx="0" cy="0"/>
+        </a:xfrm>
+      </p:grpSpPr>
+      <p:sp>
+        <p:nvSpPr>
+          <p:cNvPr id="2" name="Slide Image Placeholder 1"/>
+          <p:cNvSpPr>
+            <a:spLocks noGrp="1"/>
+          </p:cNvSpPr>
+          <p:nvPr>
+            <p:ph type="sldImg" idx="2"/>
+          </p:nvPr>
+        </p:nvSpPr>
+        <p:spPr/>
+      </p:sp>
+      <p:sp>
+        <p:nvSpPr>
+          <p:cNvPr id="3" name="Notes Placeholder 2"/>
+          <p:cNvSpPr>
+            <a:spLocks noGrp="1"/>
+          </p:cNvSpPr>
+          <p:nvPr>
+            <p:ph type="body" idx="3" sz="quarter"/>
+          </p:nvPr>
+        </p:nvSpPr>
+        <p:spPr/>
+        <p:txBody>
+          <a:bodyPr/>
+          <a:lstStyle/>
+          <a:p>
+            <a:r>
+              <a:t>এটাই আপনার সবচেয়ে শক্ত স্লাইড — সময় দিন।</a:t>
+            </a:r>
+          </a:p>
+          <a:p>
+            <a:r>
+              <a:t>আগে পরীক্ষার ন্যায্যতা প্রতিষ্ঠা করুন: "একই মডেল, একই gateway, একই ৫০০</a:t>
+            </a:r>
+          </a:p>
+          <a:p>
+            <a:r>
+              <a:t>প্রশ্ন, একই ডেটাবেস। পার্থক্য একটাই — query কে লেখে।"</a:t>
+            </a:r>
+          </a:p>
+          <a:p>
+            <a:r>
+              <a:t>তারপর মাঝের সারিতে আঙুল রাখুন: "৪% বনাম ৩৩%। যে প্রশ্নের উত্তর ডেটায় নেই,</a:t>
+            </a:r>
+          </a:p>
+          <a:p>
+            <a:r>
+              <a:t>অনিয়ন্ত্রিত মডেল প্রতি তিনবারে একবার তবু উত্তর দিয়েছে।"</a:t>
+            </a:r>
+          </a:p>
+          <a:p>
+            <a:r>
+              <a:t>নিচের একটা উদাহরণ পড়ুন — forecast-এরটা সবচেয়ে ভালো: "অতীতের মাস যোগ</a:t>
+            </a:r>
+          </a:p>
+          <a:p>
+            <a:r>
+              <a:t>করেছে। চলে, চার্ট হয়, কিন্তু forecast করে না।"</a:t>
+            </a:r>
+          </a:p>
+          <a:p>
+            <a:r>
+              <a:t>শেষ বাক্যে দুটো শব্দে জোর দিন: "এটা আর্কিটেকচার কমায় না — সরিয়ে দেয়।" </a:t>
+            </a:r>
+          </a:p>
+        </p:txBody>
+      </p:sp>
+      <p:sp>
+        <p:nvSpPr>
+          <p:cNvPr id="4" name="Slide Number Placeholder 3"/>
+          <p:cNvSpPr>
+            <a:spLocks noGrp="1"/>
+          </p:cNvSpPr>
+          <p:nvPr>
+            <p:ph type="sldNum" idx="5" sz="quarter"/>
+          </p:nvPr>
+        </p:nvSpPr>
+        <p:spPr/>
+      </p:sp>
+    </p:spTree>
+  </p:cSld>
+  <p:clrMapOvr>
+    <a:masterClrMapping/>
+  </p:clrMapOvr>
+</p:notes>
+</file>
+
+<file path=ppt/notesSlides/notesSlide22.xml><?xml version="1.0" encoding="utf-8"?>
+<p:notes xmlns:a="http://schemas.openxmlformats.org/drawingml/2006/main" xmlns:p="http://schemas.openxmlformats.org/presentationml/2006/main" xmlns:r="http://schemas.openxmlformats.org/officeDocument/2006/relationships">
+  <p:cSld>
+    <p:spTree>
+      <p:nvGrpSpPr>
+        <p:cNvPr id="1" name=""/>
+        <p:cNvGrpSpPr/>
+        <p:nvPr/>
+      </p:nvGrpSpPr>
+      <p:grpSpPr>
+        <a:xfrm>
+          <a:off x="0" y="0"/>
+          <a:ext cx="0" cy="0"/>
+          <a:chOff x="0" y="0"/>
+          <a:chExt cx="0" cy="0"/>
+        </a:xfrm>
+      </p:grpSpPr>
+      <p:sp>
+        <p:nvSpPr>
+          <p:cNvPr id="2" name="Slide Image Placeholder 1"/>
+          <p:cNvSpPr>
+            <a:spLocks noGrp="1"/>
+          </p:cNvSpPr>
+          <p:nvPr>
+            <p:ph type="sldImg" idx="2"/>
+          </p:nvPr>
+        </p:nvSpPr>
+        <p:spPr/>
+      </p:sp>
+      <p:sp>
+        <p:nvSpPr>
+          <p:cNvPr id="3" name="Notes Placeholder 2"/>
+          <p:cNvSpPr>
+            <a:spLocks noGrp="1"/>
+          </p:cNvSpPr>
+          <p:nvPr>
+            <p:ph type="body" idx="3" sz="quarter"/>
+          </p:nvPr>
+        </p:nvSpPr>
+        <p:spPr/>
+        <p:txBody>
+          <a:bodyPr/>
+          <a:lstStyle/>
+          <a:p>
+            <a:r>
+              <a:t>কেন এটা ট্র্যাক ১-এর চেয়ে শক্ত — সেটাই প্রথমে।</a:t>
+            </a:r>
+          </a:p>
+          <a:p>
+            <a:r>
+              <a:t>"৫০০ প্রশ্ন আমি লিখেছি। এই ২০টা আমি লিখিনি। তালিকাটা nopCommerce-এর নিজের</a:t>
+            </a:r>
+          </a:p>
+          <a:p>
+            <a:r>
+              <a:t>admin menu, আর মিলিয়ে দেখার লক্ষ্য ওদের নিজের কোড, source থেকে পড়া।"</a:t>
+            </a:r>
+          </a:p>
+          <a:p>
+            <a:r>
+              <a:t>দুটো চেকের পার্থক্য নিজে থেকে বলুন: "২০/২০ মানে শুধু SQL বেরিয়েছে —</a:t>
+            </a:r>
+          </a:p>
+          <a:p>
+            <a:r>
+              <a:t>ওটা কোনো টেস্ট নয়। এই বিশটার কয়েকটা এক সময় ওই চেক পাস করেও ভুল ছিল।</a:t>
+            </a:r>
+          </a:p>
+          <a:p>
+            <a:r>
+              <a:t>১৫/২০-টাই দাবি পরীক্ষা করে।"</a:t>
+            </a:r>
+          </a:p>
+          <a:p>
+            <a:r>
+              <a:t>৭৫% নিয়ে প্রশ্নের অপেক্ষা করবেন না, আগেই বলুন: "পাঁচটা মেলেনি, কিন্তু</a:t>
+            </a:r>
+          </a:p>
+          <a:p>
+            <a:r>
+              <a:t>কোনোটাই ভিন্ন মান দেয়নি। চারটার সারিসংখ্যা আলাদা — ওদের রিপোর্টে নিজস্ব</a:t>
+            </a:r>
+          </a:p>
+          <a:p>
+            <a:r>
+              <a:t>limit বসানো; দুটোর লেবেল কলাম আলাদা — নাম বনাম ইমেইল।" </a:t>
+            </a:r>
+          </a:p>
+        </p:txBody>
+      </p:sp>
+      <p:sp>
+        <p:nvSpPr>
+          <p:cNvPr id="4" name="Slide Number Placeholder 3"/>
+          <p:cNvSpPr>
+            <a:spLocks noGrp="1"/>
+          </p:cNvSpPr>
+          <p:nvPr>
+            <p:ph type="sldNum" idx="5" sz="quarter"/>
+          </p:nvPr>
+        </p:nvSpPr>
+        <p:spPr/>
+      </p:sp>
+    </p:spTree>
+  </p:cSld>
+  <p:clrMapOvr>
+    <a:masterClrMapping/>
+  </p:clrMapOvr>
+</p:notes>
+</file>
+
+<file path=ppt/notesSlides/notesSlide23.xml><?xml version="1.0" encoding="utf-8"?>
+<p:notes xmlns:a="http://schemas.openxmlformats.org/drawingml/2006/main" xmlns:p="http://schemas.openxmlformats.org/presentationml/2006/main" xmlns:r="http://schemas.openxmlformats.org/officeDocument/2006/relationships">
+  <p:cSld>
+    <p:spTree>
+      <p:nvGrpSpPr>
+        <p:cNvPr id="1" name=""/>
+        <p:cNvGrpSpPr/>
+        <p:nvPr/>
+      </p:nvGrpSpPr>
+      <p:grpSpPr>
+        <a:xfrm>
+          <a:off x="0" y="0"/>
+          <a:ext cx="0" cy="0"/>
+          <a:chOff x="0" y="0"/>
+          <a:chExt cx="0" cy="0"/>
+        </a:xfrm>
+      </p:grpSpPr>
+      <p:sp>
+        <p:nvSpPr>
+          <p:cNvPr id="2" name="Slide Image Placeholder 1"/>
+          <p:cNvSpPr>
+            <a:spLocks noGrp="1"/>
+          </p:cNvSpPr>
+          <p:nvPr>
+            <p:ph type="sldImg" idx="2"/>
+          </p:nvPr>
+        </p:nvSpPr>
+        <p:spPr/>
+      </p:sp>
+      <p:sp>
+        <p:nvSpPr>
+          <p:cNvPr id="3" name="Notes Placeholder 2"/>
+          <p:cNvSpPr>
+            <a:spLocks noGrp="1"/>
+          </p:cNvSpPr>
+          <p:nvPr>
+            <p:ph type="body" idx="3" sz="quarter"/>
+          </p:nvPr>
+        </p:nvSpPr>
+        <p:spPr/>
+        <p:txBody>
+          <a:bodyPr/>
+          <a:lstStyle/>
+          <a:p>
+            <a:r>
+              <a:t>চারটা সারি দ্রুত, DBA-রটায় থামুন।</a:t>
+            </a:r>
+          </a:p>
+          <a:p>
+            <a:r>
+              <a:t>"ব্যবসার লোক নিজেই প্রশ্ন করতে পারেন। ডেভেলপারের বারবার রিপোর্ট বানানো কমে।"</a:t>
+            </a:r>
+          </a:p>
+          <a:p>
+            <a:r>
+              <a:t>DBA: "model-লেখা SQL audit করা কঠিন। এখানে শুধু অনুমোদিত metric, dimension</a:t>
+            </a:r>
+          </a:p>
+          <a:p>
+            <a:r>
+              <a:t>আর join চলে — সবই version control-এ।"</a:t>
+            </a:r>
+          </a:p>
+          <a:p>
+            <a:r>
+              <a:t>গবেষকদের জন্য: "ভাষা বোঝা আর query তৈরির অধিকার — দুটো আলাদা করা যায়,</a:t>
+            </a:r>
+          </a:p>
+          <a:p>
+            <a:r>
+              <a:t>এটা দেখানো।" </a:t>
+            </a:r>
+          </a:p>
+        </p:txBody>
+      </p:sp>
+      <p:sp>
+        <p:nvSpPr>
+          <p:cNvPr id="4" name="Slide Number Placeholder 3"/>
+          <p:cNvSpPr>
+            <a:spLocks noGrp="1"/>
+          </p:cNvSpPr>
+          <p:nvPr>
+            <p:ph type="sldNum" idx="5" sz="quarter"/>
+          </p:nvPr>
+        </p:nvSpPr>
+        <p:spPr/>
+      </p:sp>
+    </p:spTree>
+  </p:cSld>
+  <p:clrMapOvr>
+    <a:masterClrMapping/>
+  </p:clrMapOvr>
+</p:notes>
+</file>
+
+<file path=ppt/notesSlides/notesSlide24.xml><?xml version="1.0" encoding="utf-8"?>
+<p:notes xmlns:a="http://schemas.openxmlformats.org/drawingml/2006/main" xmlns:p="http://schemas.openxmlformats.org/presentationml/2006/main" xmlns:r="http://schemas.openxmlformats.org/officeDocument/2006/relationships">
+  <p:cSld>
+    <p:spTree>
+      <p:nvGrpSpPr>
+        <p:cNvPr id="1" name=""/>
+        <p:cNvGrpSpPr/>
+        <p:nvPr/>
+      </p:nvGrpSpPr>
+      <p:grpSpPr>
+        <a:xfrm>
+          <a:off x="0" y="0"/>
+          <a:ext cx="0" cy="0"/>
+          <a:chOff x="0" y="0"/>
+          <a:chExt cx="0" cy="0"/>
+        </a:xfrm>
+      </p:grpSpPr>
+      <p:sp>
+        <p:nvSpPr>
+          <p:cNvPr id="2" name="Slide Image Placeholder 1"/>
+          <p:cNvSpPr>
+            <a:spLocks noGrp="1"/>
+          </p:cNvSpPr>
+          <p:nvPr>
+            <p:ph type="sldImg" idx="2"/>
+          </p:nvPr>
+        </p:nvSpPr>
+        <p:spPr/>
+      </p:sp>
+      <p:sp>
+        <p:nvSpPr>
+          <p:cNvPr id="3" name="Notes Placeholder 2"/>
+          <p:cNvSpPr>
+            <a:spLocks noGrp="1"/>
+          </p:cNvSpPr>
+          <p:nvPr>
+            <p:ph type="body" idx="3" sz="quarter"/>
+          </p:nvPr>
+        </p:nvSpPr>
+        <p:spPr/>
+        <p:txBody>
+          <a:bodyPr/>
+          <a:lstStyle/>
+          <a:p>
+            <a:r>
+              <a:t>আত্মরক্ষার সুরে নয়, স্পষ্ট করে বলুন।</a:t>
+            </a:r>
+          </a:p>
+          <a:p>
+            <a:r>
+              <a:t>"nopCommerce, MySQL — semantic layer ইচ্ছে করেই সীমিত আর deployment-specific।"</a:t>
+            </a:r>
+          </a:p>
+          <a:p>
+            <a:r>
+              <a:t>Spider/BIRD নিয়ে আগেই বলুন, কারণ প্রশ্নটা আসবেই:</a:t>
+            </a:r>
+          </a:p>
+          <a:p>
+            <a:r>
+              <a:t>"ওগুলো অচেনা schema-তে generalisation মাপে। deployment-specific semantic</a:t>
+            </a:r>
+          </a:p>
+          <a:p>
+            <a:r>
+              <a:t>layer সংজ্ঞাগতভাবেই তা করে না — তাই ওখানে মাপলে এমন জিনিস মাপা হতো</a:t>
+            </a:r>
+          </a:p>
+          <a:p>
+            <a:r>
+              <a:t>যা এই আর্কিটেকচার দাবিই করে না।"</a:t>
+            </a:r>
+          </a:p>
+          <a:p>
+            <a:r>
+              <a:t>model alias-এর কথাটাও নিজে বলুন: "gateway প্রতি রিকোয়েস্টে alias resolve</a:t>
+            </a:r>
+          </a:p>
+          <a:p>
+            <a:r>
+              <a:t>করেছে, তাই রানটা এক মডেলে বাঁধা নয়। প্রতিটা সারিতে কোন মডেল দিয়েছে তা লেখা।" </a:t>
+            </a:r>
+          </a:p>
+        </p:txBody>
+      </p:sp>
+      <p:sp>
+        <p:nvSpPr>
+          <p:cNvPr id="4" name="Slide Number Placeholder 3"/>
+          <p:cNvSpPr>
+            <a:spLocks noGrp="1"/>
+          </p:cNvSpPr>
+          <p:nvPr>
+            <p:ph type="sldNum" idx="5" sz="quarter"/>
+          </p:nvPr>
+        </p:nvSpPr>
+        <p:spPr/>
+      </p:sp>
+    </p:spTree>
+  </p:cSld>
+  <p:clrMapOvr>
+    <a:masterClrMapping/>
+  </p:clrMapOvr>
+</p:notes>
+</file>
+
+<file path=ppt/notesSlides/notesSlide25.xml><?xml version="1.0" encoding="utf-8"?>
+<p:notes xmlns:a="http://schemas.openxmlformats.org/drawingml/2006/main" xmlns:p="http://schemas.openxmlformats.org/presentationml/2006/main" xmlns:r="http://schemas.openxmlformats.org/officeDocument/2006/relationships">
+  <p:cSld>
+    <p:spTree>
+      <p:nvGrpSpPr>
+        <p:cNvPr id="1" name=""/>
+        <p:cNvGrpSpPr/>
+        <p:nvPr/>
+      </p:nvGrpSpPr>
+      <p:grpSpPr>
+        <a:xfrm>
+          <a:off x="0" y="0"/>
+          <a:ext cx="0" cy="0"/>
+          <a:chOff x="0" y="0"/>
+          <a:chExt cx="0" cy="0"/>
+        </a:xfrm>
+      </p:grpSpPr>
+      <p:sp>
+        <p:nvSpPr>
+          <p:cNvPr id="2" name="Slide Image Placeholder 1"/>
+          <p:cNvSpPr>
+            <a:spLocks noGrp="1"/>
+          </p:cNvSpPr>
+          <p:nvPr>
+            <p:ph type="sldImg" idx="2"/>
+          </p:nvPr>
+        </p:nvSpPr>
+        <p:spPr/>
+      </p:sp>
+      <p:sp>
+        <p:nvSpPr>
+          <p:cNvPr id="3" name="Notes Placeholder 2"/>
+          <p:cNvSpPr>
+            <a:spLocks noGrp="1"/>
+          </p:cNvSpPr>
+          <p:nvPr>
+            <p:ph type="body" idx="3" sz="quarter"/>
+          </p:nvPr>
+        </p:nvSpPr>
+        <p:spPr/>
+        <p:txBody>
+          <a:bodyPr/>
+          <a:lstStyle/>
+          <a:p>
+            <a:r>
+              <a:t>স্লাইডের নামটাই আপনার ভঙ্গি — মাথা উঁচু রেখে বলুন।</a:t>
+            </a:r>
+          </a:p>
+          <a:p>
+            <a:r>
+              <a:t>"পরীক্ষক জিজ্ঞেস করার আগে আমি নিজেই তুলছি।"</a:t>
+            </a:r>
+          </a:p>
+          <a:p>
+            <a:r>
+              <a:t>পাঁচটা দ্রুত যান, দুটোয় থামুন:</a:t>
+            </a:r>
+          </a:p>
+          <a:p>
+            <a:r>
+              <a:t>"correctness ২০টা রিপোর্টে মাপা, ৪২৫টা প্রশ্নে নয় — ওগুলোর জন্য দেখিয়েছি</a:t>
+            </a:r>
+          </a:p>
+          <a:p>
+            <a:r>
+              <a:t>SQL চলে, প্রতিটা উত্তর সঠিক তা নয়।"</a:t>
+            </a:r>
+          </a:p>
+          <a:p>
+            <a:r>
+              <a:t>"ক্যাটালগ ছোট — ১৭টা প্রোডাক্ট। অর্ডার-দিকের রিপোর্ট বাস্তব আয়তনে চলে,</a:t>
+            </a:r>
+          </a:p>
+          <a:p>
+            <a:r>
+              <a:t>কিন্তু bestsellers-এর তালিকা ছোট ক্যাটালগে কম অর্থবহ।"</a:t>
+            </a:r>
+          </a:p>
+          <a:p>
+            <a:r>
+              <a:t>এই স্লাইডটা দুর্বলতা নয় — এটাই দেখায় আপনি নিজের কাজ জানেন।</a:t>
+            </a:r>
+          </a:p>
+        </p:txBody>
+      </p:sp>
+      <p:sp>
+        <p:nvSpPr>
+          <p:cNvPr id="4" name="Slide Number Placeholder 3"/>
+          <p:cNvSpPr>
+            <a:spLocks noGrp="1"/>
+          </p:cNvSpPr>
+          <p:nvPr>
+            <p:ph type="sldNum" idx="5" sz="quarter"/>
+          </p:nvPr>
+        </p:nvSpPr>
+        <p:spPr/>
+      </p:sp>
+    </p:spTree>
+  </p:cSld>
+  <p:clrMapOvr>
+    <a:masterClrMapping/>
+  </p:clrMapOvr>
+</p:notes>
+</file>
+
+<file path=ppt/notesSlides/notesSlide26.xml><?xml version="1.0" encoding="utf-8"?>
+<p:notes xmlns:a="http://schemas.openxmlformats.org/drawingml/2006/main" xmlns:p="http://schemas.openxmlformats.org/presentationml/2006/main" xmlns:r="http://schemas.openxmlformats.org/officeDocument/2006/relationships">
+  <p:cSld>
+    <p:spTree>
+      <p:nvGrpSpPr>
+        <p:cNvPr id="1" name=""/>
+        <p:cNvGrpSpPr/>
+        <p:nvPr/>
+      </p:nvGrpSpPr>
+      <p:grpSpPr>
+        <a:xfrm>
+          <a:off x="0" y="0"/>
+          <a:ext cx="0" cy="0"/>
+          <a:chOff x="0" y="0"/>
+          <a:chExt cx="0" cy="0"/>
+        </a:xfrm>
+      </p:grpSpPr>
+      <p:sp>
+        <p:nvSpPr>
+          <p:cNvPr id="2" name="Slide Image Placeholder 1"/>
+          <p:cNvSpPr>
+            <a:spLocks noGrp="1"/>
+          </p:cNvSpPr>
+          <p:nvPr>
+            <p:ph type="sldImg" idx="2"/>
+          </p:nvPr>
+        </p:nvSpPr>
+        <p:spPr/>
+      </p:sp>
+      <p:sp>
+        <p:nvSpPr>
+          <p:cNvPr id="3" name="Notes Placeholder 2"/>
+          <p:cNvSpPr>
+            <a:spLocks noGrp="1"/>
+          </p:cNvSpPr>
+          <p:nvPr>
+            <p:ph type="body" idx="3" sz="quarter"/>
+          </p:nvPr>
+        </p:nvSpPr>
+        <p:spPr/>
+        <p:txBody>
+          <a:bodyPr/>
+          <a:lstStyle/>
+          <a:p>
+            <a:r>
+              <a:t>চারটা বুলেট পড়বেন না। তিন বাক্যে বলুন।</a:t>
+            </a:r>
+          </a:p>
+          <a:p>
+            <a:r>
+              <a:t>"AEGIS মডেলকে ভাষা বোঝার কাজে রাখে, কিন্তু SQL লেখার অধিকার কেড়ে নেয়।"</a:t>
+            </a:r>
+          </a:p>
+          <a:p>
+            <a:r>
+              <a:t>"সংজ্ঞাগুলো স্পষ্ট, auditable, আর পুনর্ব্যবহারযোগ্য।"</a:t>
+            </a:r>
+          </a:p>
+          <a:p>
+            <a:r>
+              <a:t>"আর এটা শুধু ধারণা নয় — প্রোটোটাইপ, ৫০০ প্রশ্ন, আর প্ল্যাটফর্মের নিজের</a:t>
+            </a:r>
+          </a:p>
+          <a:p>
+            <a:r>
+              <a:t>রিপোর্টের বিপরীতে differential দিয়ে মেপে দেখানো।"</a:t>
+            </a:r>
+          </a:p>
+          <a:p>
+            <a:r>
+              <a:t>মূল অবদান এক বাক্যে: "নিরাপদ LLM-সহায়ক ন্যাচারাল ল্যাঙ্গুয়েজ অ্যানালিটিক্সের</a:t>
+            </a:r>
+          </a:p>
+          <a:p>
+            <a:r>
+              <a:t>জন্য একটা constraint-based আর্কিটেকচার।" </a:t>
+            </a:r>
+          </a:p>
+        </p:txBody>
+      </p:sp>
+      <p:sp>
+        <p:nvSpPr>
+          <p:cNvPr id="4" name="Slide Number Placeholder 3"/>
+          <p:cNvSpPr>
+            <a:spLocks noGrp="1"/>
+          </p:cNvSpPr>
+          <p:nvPr>
+            <p:ph type="sldNum" idx="5" sz="quarter"/>
+          </p:nvPr>
+        </p:nvSpPr>
+        <p:spPr/>
+      </p:sp>
+    </p:spTree>
+  </p:cSld>
+  <p:clrMapOvr>
+    <a:masterClrMapping/>
+  </p:clrMapOvr>
+</p:notes>
+</file>
+
+<file path=ppt/notesSlides/notesSlide27.xml><?xml version="1.0" encoding="utf-8"?>
+<p:notes xmlns:a="http://schemas.openxmlformats.org/drawingml/2006/main" xmlns:p="http://schemas.openxmlformats.org/presentationml/2006/main" xmlns:r="http://schemas.openxmlformats.org/officeDocument/2006/relationships">
+  <p:cSld>
+    <p:spTree>
+      <p:nvGrpSpPr>
+        <p:cNvPr id="1" name=""/>
+        <p:cNvGrpSpPr/>
+        <p:nvPr/>
+      </p:nvGrpSpPr>
+      <p:grpSpPr>
+        <a:xfrm>
+          <a:off x="0" y="0"/>
+          <a:ext cx="0" cy="0"/>
+          <a:chOff x="0" y="0"/>
+          <a:chExt cx="0" cy="0"/>
+        </a:xfrm>
+      </p:grpSpPr>
+      <p:sp>
+        <p:nvSpPr>
+          <p:cNvPr id="2" name="Slide Image Placeholder 1"/>
+          <p:cNvSpPr>
+            <a:spLocks noGrp="1"/>
+          </p:cNvSpPr>
+          <p:nvPr>
+            <p:ph type="sldImg" idx="2"/>
+          </p:nvPr>
+        </p:nvSpPr>
+        <p:spPr/>
+      </p:sp>
+      <p:sp>
+        <p:nvSpPr>
+          <p:cNvPr id="3" name="Notes Placeholder 2"/>
+          <p:cNvSpPr>
+            <a:spLocks noGrp="1"/>
+          </p:cNvSpPr>
+          <p:nvPr>
+            <p:ph type="body" idx="3" sz="quarter"/>
+          </p:nvPr>
+        </p:nvSpPr>
+        <p:spPr/>
+        <p:txBody>
+          <a:bodyPr/>
+          <a:lstStyle/>
+          <a:p>
+            <a:r>
+              <a:t>দ্রুত যান — এটা শেষের দিকের স্লাইড, কমিটি ততক্ষণে প্রশ্নের জন্য তৈরি।</a:t>
+            </a:r>
+          </a:p>
+          <a:p>
+            <a:r>
+              <a:t>সবচেয়ে শক্ত পয়েন্টটা প্রথমে বলুন: "শুধু semantic layer বদলে অন্য একটা</a:t>
+            </a:r>
+          </a:p>
+          <a:p>
+            <a:r>
+              <a:t>ই-কমার্স সিস্টেমে চালানো — এটাই পরবর্তী আসল পরীক্ষা, কারণ এতেই প্রমাণ হবে</a:t>
+            </a:r>
+          </a:p>
+          <a:p>
+            <a:r>
+              <a:t>আর্কিটেকচারটা schema-নিরপেক্ষ।"</a:t>
+            </a:r>
+          </a:p>
+          <a:p>
+            <a:r>
+              <a:t>বাকিগুলো এক নিঃশ্বাসে: আরও oracle রিপোর্ট, PostgreSQL ও SQL Server,</a:t>
+            </a:r>
+          </a:p>
+          <a:p>
+            <a:r>
+              <a:t>clarification আচরণ, চার্ট সুপারিশ।</a:t>
+            </a:r>
+          </a:p>
+        </p:txBody>
+      </p:sp>
+      <p:sp>
+        <p:nvSpPr>
+          <p:cNvPr id="4" name="Slide Number Placeholder 3"/>
+          <p:cNvSpPr>
+            <a:spLocks noGrp="1"/>
+          </p:cNvSpPr>
+          <p:nvPr>
+            <p:ph type="sldNum" idx="5" sz="quarter"/>
+          </p:nvPr>
+        </p:nvSpPr>
+        <p:spPr/>
+      </p:sp>
+    </p:spTree>
+  </p:cSld>
+  <p:clrMapOvr>
+    <a:masterClrMapping/>
+  </p:clrMapOvr>
+</p:notes>
+</file>
+
+<file path=ppt/notesSlides/notesSlide28.xml><?xml version="1.0" encoding="utf-8"?>
+<p:notes xmlns:a="http://schemas.openxmlformats.org/drawingml/2006/main" xmlns:p="http://schemas.openxmlformats.org/presentationml/2006/main" xmlns:r="http://schemas.openxmlformats.org/officeDocument/2006/relationships">
+  <p:cSld>
+    <p:spTree>
+      <p:nvGrpSpPr>
+        <p:cNvPr id="1" name=""/>
+        <p:cNvGrpSpPr/>
+        <p:nvPr/>
+      </p:nvGrpSpPr>
+      <p:grpSpPr>
+        <a:xfrm>
+          <a:off x="0" y="0"/>
+          <a:ext cx="0" cy="0"/>
+          <a:chOff x="0" y="0"/>
+          <a:chExt cx="0" cy="0"/>
+        </a:xfrm>
+      </p:grpSpPr>
+      <p:sp>
+        <p:nvSpPr>
+          <p:cNvPr id="2" name="Slide Image Placeholder 1"/>
+          <p:cNvSpPr>
+            <a:spLocks noGrp="1"/>
+          </p:cNvSpPr>
+          <p:nvPr>
+            <p:ph type="sldImg" idx="2"/>
+          </p:nvPr>
+        </p:nvSpPr>
+        <p:spPr/>
+      </p:sp>
+      <p:sp>
+        <p:nvSpPr>
+          <p:cNvPr id="3" name="Notes Placeholder 2"/>
+          <p:cNvSpPr>
+            <a:spLocks noGrp="1"/>
+          </p:cNvSpPr>
+          <p:nvPr>
+            <p:ph type="body" idx="3" sz="quarter"/>
+          </p:nvPr>
+        </p:nvSpPr>
+        <p:spPr/>
+        <p:txBody>
+          <a:bodyPr/>
+          <a:lstStyle/>
+          <a:p>
+            <a:r>
+              <a:t>থামবেন না, পড়বেন না।</a:t>
+            </a:r>
+          </a:p>
+          <a:p>
+            <a:r>
+              <a:t>"রেফারেন্সগুলো এখানে আছে" বলে পরের স্লাইডে যান।</a:t>
+            </a:r>
+          </a:p>
+        </p:txBody>
+      </p:sp>
+      <p:sp>
+        <p:nvSpPr>
+          <p:cNvPr id="4" name="Slide Number Placeholder 3"/>
+          <p:cNvSpPr>
+            <a:spLocks noGrp="1"/>
+          </p:cNvSpPr>
+          <p:nvPr>
+            <p:ph type="sldNum" idx="5" sz="quarter"/>
+          </p:nvPr>
+        </p:nvSpPr>
+        <p:spPr/>
+      </p:sp>
+    </p:spTree>
+  </p:cSld>
+  <p:clrMapOvr>
+    <a:masterClrMapping/>
+  </p:clrMapOvr>
+</p:notes>
+</file>
+
+<file path=ppt/notesSlides/notesSlide29.xml><?xml version="1.0" encoding="utf-8"?>
+<p:notes xmlns:a="http://schemas.openxmlformats.org/drawingml/2006/main" xmlns:p="http://schemas.openxmlformats.org/presentationml/2006/main" xmlns:r="http://schemas.openxmlformats.org/officeDocument/2006/relationships">
+  <p:cSld>
+    <p:spTree>
+      <p:nvGrpSpPr>
+        <p:cNvPr id="1" name=""/>
+        <p:cNvGrpSpPr/>
+        <p:nvPr/>
+      </p:nvGrpSpPr>
+      <p:grpSpPr>
+        <a:xfrm>
+          <a:off x="0" y="0"/>
+          <a:ext cx="0" cy="0"/>
+          <a:chOff x="0" y="0"/>
+          <a:chExt cx="0" cy="0"/>
+        </a:xfrm>
+      </p:grpSpPr>
+      <p:sp>
+        <p:nvSpPr>
+          <p:cNvPr id="2" name="Slide Image Placeholder 1"/>
+          <p:cNvSpPr>
+            <a:spLocks noGrp="1"/>
+          </p:cNvSpPr>
+          <p:nvPr>
+            <p:ph type="sldImg" idx="2"/>
+          </p:nvPr>
+        </p:nvSpPr>
+        <p:spPr/>
+      </p:sp>
+      <p:sp>
+        <p:nvSpPr>
+          <p:cNvPr id="3" name="Notes Placeholder 2"/>
+          <p:cNvSpPr>
+            <a:spLocks noGrp="1"/>
+          </p:cNvSpPr>
+          <p:nvPr>
+            <p:ph type="body" idx="3" sz="quarter"/>
+          </p:nvPr>
+        </p:nvSpPr>
+        <p:spPr/>
+        <p:txBody>
+          <a:bodyPr/>
+          <a:lstStyle/>
+          <a:p>
+            <a:r>
+              <a:t>ধন্যবাদ দিন, তারপর চুপ করুন।</a:t>
+            </a:r>
+          </a:p>
+          <a:p>
+            <a:r>
+              <a:t>"শুনবার জন্য ধন্যবাদ। প্রশ্ন থাকলে করতে পারেন।"</a:t>
+            </a:r>
+          </a:p>
+          <a:p>
+            <a:r>
+              <a:t>তারপর সত্যিই থামুন — নিজের কথায় ফাঁক ভরাট করবেন না।</a:t>
+            </a:r>
+          </a:p>
+          <a:p>
+            <a:r>
+              <a:t>মনে রাখবেন: তিনটা appendix স্লাইড পেছনে আছে — semantic layer ফাইল,</a:t>
+            </a:r>
+          </a:p>
+          <a:p>
+            <a:r>
+              <a:t>compiler কোড, আর constrained decoding-এর তুলনা। প্রশ্ন এলে ওগুলোয় যান।</a:t>
+            </a:r>
+          </a:p>
+        </p:txBody>
+      </p:sp>
+      <p:sp>
+        <p:nvSpPr>
+          <p:cNvPr id="4" name="Slide Number Placeholder 3"/>
+          <p:cNvSpPr>
+            <a:spLocks noGrp="1"/>
+          </p:cNvSpPr>
+          <p:nvPr>
+            <p:ph type="sldNum" idx="5" sz="quarter"/>
+          </p:nvPr>
+        </p:nvSpPr>
+        <p:spPr/>
+      </p:sp>
+    </p:spTree>
+  </p:cSld>
+  <p:clrMapOvr>
+    <a:masterClrMapping/>
+  </p:clrMapOvr>
+</p:notes>
+</file>
+
+<file path=ppt/notesSlides/notesSlide3.xml><?xml version="1.0" encoding="utf-8"?>
+<p:notes xmlns:a="http://schemas.openxmlformats.org/drawingml/2006/main" xmlns:p="http://schemas.openxmlformats.org/presentationml/2006/main" xmlns:r="http://schemas.openxmlformats.org/officeDocument/2006/relationships">
+  <p:cSld>
+    <p:spTree>
+      <p:nvGrpSpPr>
+        <p:cNvPr id="1" name=""/>
+        <p:cNvGrpSpPr/>
+        <p:nvPr/>
+      </p:nvGrpSpPr>
+      <p:grpSpPr>
+        <a:xfrm>
+          <a:off x="0" y="0"/>
+          <a:ext cx="0" cy="0"/>
+          <a:chOff x="0" y="0"/>
+          <a:chExt cx="0" cy="0"/>
+        </a:xfrm>
+      </p:grpSpPr>
+      <p:sp>
+        <p:nvSpPr>
+          <p:cNvPr id="2" name="Slide Image Placeholder 1"/>
+          <p:cNvSpPr>
+            <a:spLocks noGrp="1"/>
+          </p:cNvSpPr>
+          <p:nvPr>
+            <p:ph type="sldImg" idx="2"/>
+          </p:nvPr>
+        </p:nvSpPr>
+        <p:spPr/>
+      </p:sp>
+      <p:sp>
+        <p:nvSpPr>
+          <p:cNvPr id="3" name="Notes Placeholder 2"/>
+          <p:cNvSpPr>
+            <a:spLocks noGrp="1"/>
+          </p:cNvSpPr>
+          <p:nvPr>
+            <p:ph type="body" idx="3" sz="quarter"/>
+          </p:nvPr>
+        </p:nvSpPr>
+        <p:spPr/>
+        <p:txBody>
+          <a:bodyPr/>
+          <a:lstStyle/>
+          <a:p>
+            <a:r>
+              <a:t>মূল সুরটা এখানেই ঠিক করবেন।</a:t>
+            </a:r>
+          </a:p>
+          <a:p>
+            <a:r>
+              <a:t>বলুন: "ই-কমার্স সিস্টেমে ডেটা আছে, কিন্তু ড্যাশবোর্ড শুধু আগে থেকে বানানো প্রশ্নের</a:t>
+            </a:r>
+          </a:p>
+          <a:p>
+            <a:r>
+              <a:t>উত্তর দেয়। নতুন কম্বিনেশন লাগলেই ডেভেলপারের কাছে যেতে হয়।"</a:t>
+            </a:r>
+          </a:p>
+          <a:p>
+            <a:r>
+              <a:t>তারপর টানটা টানুন: "LLM এই দেরিটা কমাতে পারে — কিন্তু সে যদি নিজে SQL লেখে,</a:t>
+            </a:r>
+          </a:p>
+          <a:p>
+            <a:r>
+              <a:t>তাহলে ডেটাবেসে কোড লেখার অধিকার তাকে দিয়ে দেওয়া হলো।"</a:t>
+            </a:r>
+          </a:p>
+          <a:p>
+            <a:r>
+              <a:t>শেষ করুন এক বাক্যে: "AEGIS-এ মডেল শুধু বোঝে, চালায় না।" </a:t>
+            </a:r>
+          </a:p>
+        </p:txBody>
+      </p:sp>
+      <p:sp>
+        <p:nvSpPr>
+          <p:cNvPr id="4" name="Slide Number Placeholder 3"/>
+          <p:cNvSpPr>
+            <a:spLocks noGrp="1"/>
+          </p:cNvSpPr>
+          <p:nvPr>
+            <p:ph type="sldNum" idx="5" sz="quarter"/>
+          </p:nvPr>
+        </p:nvSpPr>
+        <p:spPr/>
+      </p:sp>
+    </p:spTree>
+  </p:cSld>
+  <p:clrMapOvr>
+    <a:masterClrMapping/>
+  </p:clrMapOvr>
+</p:notes>
+</file>
+
+<file path=ppt/notesSlides/notesSlide30.xml><?xml version="1.0" encoding="utf-8"?>
+<p:notes xmlns:a="http://schemas.openxmlformats.org/drawingml/2006/main" xmlns:p="http://schemas.openxmlformats.org/presentationml/2006/main" xmlns:r="http://schemas.openxmlformats.org/officeDocument/2006/relationships">
+  <p:cSld>
+    <p:spTree>
+      <p:nvGrpSpPr>
+        <p:cNvPr id="1" name=""/>
+        <p:cNvGrpSpPr/>
+        <p:nvPr/>
+      </p:nvGrpSpPr>
+      <p:grpSpPr>
+        <a:xfrm>
+          <a:off x="0" y="0"/>
+          <a:ext cx="0" cy="0"/>
+          <a:chOff x="0" y="0"/>
+          <a:chExt cx="0" cy="0"/>
+        </a:xfrm>
+      </p:grpSpPr>
+      <p:sp>
+        <p:nvSpPr>
+          <p:cNvPr id="2" name="Slide Image Placeholder 1"/>
+          <p:cNvSpPr>
+            <a:spLocks noGrp="1"/>
+          </p:cNvSpPr>
+          <p:nvPr>
+            <p:ph type="sldImg" idx="2"/>
+          </p:nvPr>
+        </p:nvSpPr>
+        <p:spPr/>
+      </p:sp>
+      <p:sp>
+        <p:nvSpPr>
+          <p:cNvPr id="3" name="Notes Placeholder 2"/>
+          <p:cNvSpPr>
+            <a:spLocks noGrp="1"/>
+          </p:cNvSpPr>
+          <p:nvPr>
+            <p:ph type="body" idx="3" sz="quarter"/>
+          </p:nvPr>
+        </p:nvSpPr>
+        <p:spPr/>
+        <p:txBody>
+          <a:bodyPr/>
+          <a:lstStyle/>
+          <a:p>
+            <a:r>
+              <a:t>শুধু প্রশ্ন এলে দেখাবেন — "সংজ্ঞাগুলো কোথায়?" বা "কে ঠিক করে revenue মানে কী?"</a:t>
+            </a:r>
+          </a:p>
+          <a:p>
+            <a:r>
+              <a:t>বলুন: "এটা আমার লেখা একটা ফাইল। মডেল এটা তৈরি করে না, বদলাতেও পারে না।</a:t>
+            </a:r>
+          </a:p>
+          <a:p>
+            <a:r>
+              <a:t>নতুন metric লাগলে আমি এখানে লিখি — মডেলকে নতুন করে কিছু শেখাতে হয় না।" </a:t>
+            </a:r>
+          </a:p>
+        </p:txBody>
+      </p:sp>
+      <p:sp>
+        <p:nvSpPr>
+          <p:cNvPr id="4" name="Slide Number Placeholder 3"/>
+          <p:cNvSpPr>
+            <a:spLocks noGrp="1"/>
+          </p:cNvSpPr>
+          <p:nvPr>
+            <p:ph type="sldNum" idx="5" sz="quarter"/>
+          </p:nvPr>
+        </p:nvSpPr>
+        <p:spPr/>
+      </p:sp>
+    </p:spTree>
+  </p:cSld>
+  <p:clrMapOvr>
+    <a:masterClrMapping/>
+  </p:clrMapOvr>
+</p:notes>
+</file>
+
+<file path=ppt/notesSlides/notesSlide31.xml><?xml version="1.0" encoding="utf-8"?>
+<p:notes xmlns:a="http://schemas.openxmlformats.org/drawingml/2006/main" xmlns:p="http://schemas.openxmlformats.org/presentationml/2006/main" xmlns:r="http://schemas.openxmlformats.org/officeDocument/2006/relationships">
+  <p:cSld>
+    <p:spTree>
+      <p:nvGrpSpPr>
+        <p:cNvPr id="1" name=""/>
+        <p:cNvGrpSpPr/>
+        <p:nvPr/>
+      </p:nvGrpSpPr>
+      <p:grpSpPr>
+        <a:xfrm>
+          <a:off x="0" y="0"/>
+          <a:ext cx="0" cy="0"/>
+          <a:chOff x="0" y="0"/>
+          <a:chExt cx="0" cy="0"/>
+        </a:xfrm>
+      </p:grpSpPr>
+      <p:sp>
+        <p:nvSpPr>
+          <p:cNvPr id="2" name="Slide Image Placeholder 1"/>
+          <p:cNvSpPr>
+            <a:spLocks noGrp="1"/>
+          </p:cNvSpPr>
+          <p:nvPr>
+            <p:ph type="sldImg" idx="2"/>
+          </p:nvPr>
+        </p:nvSpPr>
+        <p:spPr/>
+      </p:sp>
+      <p:sp>
+        <p:nvSpPr>
+          <p:cNvPr id="3" name="Notes Placeholder 2"/>
+          <p:cNvSpPr>
+            <a:spLocks noGrp="1"/>
+          </p:cNvSpPr>
+          <p:nvPr>
+            <p:ph type="body" idx="3" sz="quarter"/>
+          </p:nvPr>
+        </p:nvSpPr>
+        <p:spPr/>
+        <p:txBody>
+          <a:bodyPr/>
+          <a:lstStyle/>
+          <a:p>
+            <a:r>
+              <a:t>প্রশ্ন এলে দেখাবেন — "compiler আসলে কী করে?" বা "SQL কোথা থেকে আসে?"</a:t>
+            </a:r>
+          </a:p>
+          <a:p>
+            <a:r>
+              <a:t>কোডে আঙুল রেখে বলুন: "এই f-string-এ কী কী পরিবর্তনশীল দেখুন। expression</a:t>
+            </a:r>
+          </a:p>
+          <a:p>
+            <a:r>
+              <a:t>আসে আমার config থেকে, join আসে আমার graph থেকে, আর ইউজারের প্রতিটা মান</a:t>
+            </a:r>
+          </a:p>
+          <a:p>
+            <a:r>
+              <a:t>যায় bound parameter হিসেবে।"</a:t>
+            </a:r>
+          </a:p>
+          <a:p>
+            <a:r>
+              <a:t>শেষ বাক্য: "ইউজার বা মডেলের কোনো স্ট্রিং কখনো SQL-এর কাঠামোয় জোড়া লাগে না।" </a:t>
+            </a:r>
+          </a:p>
+        </p:txBody>
+      </p:sp>
+      <p:sp>
+        <p:nvSpPr>
+          <p:cNvPr id="4" name="Slide Number Placeholder 3"/>
+          <p:cNvSpPr>
+            <a:spLocks noGrp="1"/>
+          </p:cNvSpPr>
+          <p:nvPr>
+            <p:ph type="sldNum" idx="5" sz="quarter"/>
+          </p:nvPr>
+        </p:nvSpPr>
+        <p:spPr/>
+      </p:sp>
+    </p:spTree>
+  </p:cSld>
+  <p:clrMapOvr>
+    <a:masterClrMapping/>
+  </p:clrMapOvr>
+</p:notes>
+</file>
+
+<file path=ppt/notesSlides/notesSlide32.xml><?xml version="1.0" encoding="utf-8"?>
+<p:notes xmlns:a="http://schemas.openxmlformats.org/drawingml/2006/main" xmlns:p="http://schemas.openxmlformats.org/presentationml/2006/main" xmlns:r="http://schemas.openxmlformats.org/officeDocument/2006/relationships">
+  <p:cSld>
+    <p:spTree>
+      <p:nvGrpSpPr>
+        <p:cNvPr id="1" name=""/>
+        <p:cNvGrpSpPr/>
+        <p:nvPr/>
+      </p:nvGrpSpPr>
+      <p:grpSpPr>
+        <a:xfrm>
+          <a:off x="0" y="0"/>
+          <a:ext cx="0" cy="0"/>
+          <a:chOff x="0" y="0"/>
+          <a:chExt cx="0" cy="0"/>
+        </a:xfrm>
+      </p:grpSpPr>
+      <p:sp>
+        <p:nvSpPr>
+          <p:cNvPr id="2" name="Slide Image Placeholder 1"/>
+          <p:cNvSpPr>
+            <a:spLocks noGrp="1"/>
+          </p:cNvSpPr>
+          <p:nvPr>
+            <p:ph type="sldImg" idx="2"/>
+          </p:nvPr>
+        </p:nvSpPr>
+        <p:spPr/>
+      </p:sp>
+      <p:sp>
+        <p:nvSpPr>
+          <p:cNvPr id="3" name="Notes Placeholder 2"/>
+          <p:cNvSpPr>
+            <a:spLocks noGrp="1"/>
+          </p:cNvSpPr>
+          <p:nvPr>
+            <p:ph type="body" idx="3" sz="quarter"/>
+          </p:nvPr>
+        </p:nvSpPr>
+        <p:spPr/>
+        <p:txBody>
+          <a:bodyPr/>
+          <a:lstStyle/>
+          <a:p>
+            <a:r>
+              <a:t>প্রশ্ন এলে দেখাবেন — "PICARD-এর মতো constrained decoding করলেন না কেন?"</a:t>
+            </a:r>
+          </a:p>
+          <a:p>
+            <a:r>
+              <a:t>মূল পার্থক্যটা বলুন: "constrained decoding নিশ্চিত করে SQL-টা বৈধ।</a:t>
+            </a:r>
+          </a:p>
+          <a:p>
+            <a:r>
+              <a:t>কিন্তু বৈধ SQL-ও ভুল টেবিল পড়তে পারে, ভুল সংজ্ঞা ব্যবহার করতে পারে,</a:t>
+            </a:r>
+          </a:p>
+          <a:p>
+            <a:r>
+              <a:t>row-level নিয়ম অগ্রাহ্য করতে পারে।"</a:t>
+            </a:r>
+          </a:p>
+          <a:p>
+            <a:r>
+              <a:t>তারপর: "টেমপ্লেট syntax নিয়ন্ত্রণ করে না — কোন প্রশ্নগুলো আদৌ জিজ্ঞেস করা</a:t>
+            </a:r>
+          </a:p>
+          <a:p>
+            <a:r>
+              <a:t>যাবে সেটা নিয়ন্ত্রণ করে। ওটা ভিন্ন আর শক্ত গ্যারান্টি।" </a:t>
+            </a:r>
+          </a:p>
+        </p:txBody>
+      </p:sp>
+      <p:sp>
+        <p:nvSpPr>
+          <p:cNvPr id="4" name="Slide Number Placeholder 3"/>
+          <p:cNvSpPr>
+            <a:spLocks noGrp="1"/>
+          </p:cNvSpPr>
+          <p:nvPr>
+            <p:ph type="sldNum" idx="5" sz="quarter"/>
+          </p:nvPr>
+        </p:nvSpPr>
+        <p:spPr/>
+      </p:sp>
+    </p:spTree>
+  </p:cSld>
+  <p:clrMapOvr>
+    <a:masterClrMapping/>
+  </p:clrMapOvr>
+</p:notes>
+</file>
+
+<file path=ppt/notesSlides/notesSlide4.xml><?xml version="1.0" encoding="utf-8"?>
+<p:notes xmlns:a="http://schemas.openxmlformats.org/drawingml/2006/main" xmlns:p="http://schemas.openxmlformats.org/presentationml/2006/main" xmlns:r="http://schemas.openxmlformats.org/officeDocument/2006/relationships">
+  <p:cSld>
+    <p:spTree>
+      <p:nvGrpSpPr>
+        <p:cNvPr id="1" name=""/>
+        <p:cNvGrpSpPr/>
+        <p:nvPr/>
+      </p:nvGrpSpPr>
+      <p:grpSpPr>
+        <a:xfrm>
+          <a:off x="0" y="0"/>
+          <a:ext cx="0" cy="0"/>
+          <a:chOff x="0" y="0"/>
+          <a:chExt cx="0" cy="0"/>
+        </a:xfrm>
+      </p:grpSpPr>
+      <p:sp>
+        <p:nvSpPr>
+          <p:cNvPr id="2" name="Slide Image Placeholder 1"/>
+          <p:cNvSpPr>
+            <a:spLocks noGrp="1"/>
+          </p:cNvSpPr>
+          <p:nvPr>
+            <p:ph type="sldImg" idx="2"/>
+          </p:nvPr>
+        </p:nvSpPr>
+        <p:spPr/>
+      </p:sp>
+      <p:sp>
+        <p:nvSpPr>
+          <p:cNvPr id="3" name="Notes Placeholder 2"/>
+          <p:cNvSpPr>
+            <a:spLocks noGrp="1"/>
+          </p:cNvSpPr>
+          <p:nvPr>
+            <p:ph type="body" idx="3" sz="quarter"/>
+          </p:nvPr>
+        </p:nvSpPr>
+        <p:spPr/>
+        <p:txBody>
+          <a:bodyPr/>
+          <a:lstStyle/>
+          <a:p>
+            <a:r>
+              <a:t>তিনটা ঝুঁকি — নাম ধরে বলুন, পড়বেন না।</a:t>
+            </a:r>
+          </a:p>
+          <a:p>
+            <a:r>
+              <a:t>১. Injection — প্রম্পট ঘুরিয়ে DROP বা DELETE বের করে আনা যায়।</a:t>
+            </a:r>
+          </a:p>
+          <a:p>
+            <a:r>
+              <a:t>২. Hallucination — না-থাকা টেবিল, না-থাকা join, না-থাকা কলাম।</a:t>
+            </a:r>
+          </a:p>
+          <a:p>
+            <a:r>
+              <a:t>৩. Access control — generated query অ্যাপের row-level নিয়ম জানেই না।</a:t>
+            </a:r>
+          </a:p>
+          <a:p>
+            <a:r>
+              <a:t>জোর দিন: "তিনটাই এক জায়গা থেকে আসে — মডেলকে SQL লেখার ক্ষমতা দেওয়া হয়েছে।</a:t>
+            </a:r>
+          </a:p>
+          <a:p>
+            <a:r>
+              <a:t>তাই আমার সমাধান ওই ক্ষমতাটাই কেড়ে নেয়।" </a:t>
+            </a:r>
+          </a:p>
+        </p:txBody>
+      </p:sp>
+      <p:sp>
+        <p:nvSpPr>
+          <p:cNvPr id="4" name="Slide Number Placeholder 3"/>
+          <p:cNvSpPr>
+            <a:spLocks noGrp="1"/>
+          </p:cNvSpPr>
+          <p:nvPr>
+            <p:ph type="sldNum" idx="5" sz="quarter"/>
+          </p:nvPr>
+        </p:nvSpPr>
+        <p:spPr/>
+      </p:sp>
+    </p:spTree>
+  </p:cSld>
+  <p:clrMapOvr>
+    <a:masterClrMapping/>
+  </p:clrMapOvr>
+</p:notes>
+</file>
+
+<file path=ppt/notesSlides/notesSlide5.xml><?xml version="1.0" encoding="utf-8"?>
+<p:notes xmlns:a="http://schemas.openxmlformats.org/drawingml/2006/main" xmlns:p="http://schemas.openxmlformats.org/presentationml/2006/main" xmlns:r="http://schemas.openxmlformats.org/officeDocument/2006/relationships">
+  <p:cSld>
+    <p:spTree>
+      <p:nvGrpSpPr>
+        <p:cNvPr id="1" name=""/>
+        <p:cNvGrpSpPr/>
+        <p:nvPr/>
+      </p:nvGrpSpPr>
+      <p:grpSpPr>
+        <a:xfrm>
+          <a:off x="0" y="0"/>
+          <a:ext cx="0" cy="0"/>
+          <a:chOff x="0" y="0"/>
+          <a:chExt cx="0" cy="0"/>
+        </a:xfrm>
+      </p:grpSpPr>
+      <p:sp>
+        <p:nvSpPr>
+          <p:cNvPr id="2" name="Slide Image Placeholder 1"/>
+          <p:cNvSpPr>
+            <a:spLocks noGrp="1"/>
+          </p:cNvSpPr>
+          <p:nvPr>
+            <p:ph type="sldImg" idx="2"/>
+          </p:nvPr>
+        </p:nvSpPr>
+        <p:spPr/>
+      </p:sp>
+      <p:sp>
+        <p:nvSpPr>
+          <p:cNvPr id="3" name="Notes Placeholder 2"/>
+          <p:cNvSpPr>
+            <a:spLocks noGrp="1"/>
+          </p:cNvSpPr>
+          <p:nvPr>
+            <p:ph type="body" idx="3" sz="quarter"/>
+          </p:nvPr>
+        </p:nvSpPr>
+        <p:spPr/>
+        <p:txBody>
+          <a:bodyPr/>
+          <a:lstStyle/>
+          <a:p>
+            <a:r>
+              <a:t>এটাই পুরো থিসিসের সবচেয়ে সহজ স্লাইড — ধীরে বলুন।</a:t>
+            </a:r>
+          </a:p>
+          <a:p>
+            <a:r>
+              <a:t>রেস্তোরাঁর উপমাটা বলুন: "ওয়েটার অর্ডার লেখে — কোন খাবার, কয় প্লেট।</a:t>
+            </a:r>
+          </a:p>
+          <a:p>
+            <a:r>
+              <a:t>ওয়েটার কখনো রান্নাঘরে ঢুকে রান্না করে না।"</a:t>
+            </a:r>
+          </a:p>
+          <a:p>
+            <a:r>
+              <a:t>তারপর টেবিলটা দেখিয়ে: ওয়েটার = মডেল, অর্ডার ফর্ম = Intent Object,</a:t>
+            </a:r>
+          </a:p>
+          <a:p>
+            <a:r>
+              <a:t>রান্নাঘর = compiler।</a:t>
+            </a:r>
+          </a:p>
+          <a:p>
+            <a:r>
+              <a:t>শেষ বাক্য: "মডেল অনুমোদিত তালিকা থেকে নাম বাছে। query সে লেখে না।"</a:t>
+            </a:r>
+          </a:p>
+          <a:p>
+            <a:r>
+              <a:t>কমিটির কেউ টেকনিক্যাল না হলে তিনি এই স্লাইডটাই মনে রাখবেন।</a:t>
+            </a:r>
+          </a:p>
+        </p:txBody>
+      </p:sp>
+      <p:sp>
+        <p:nvSpPr>
+          <p:cNvPr id="4" name="Slide Number Placeholder 3"/>
+          <p:cNvSpPr>
+            <a:spLocks noGrp="1"/>
+          </p:cNvSpPr>
+          <p:nvPr>
+            <p:ph type="sldNum" idx="5" sz="quarter"/>
+          </p:nvPr>
+        </p:nvSpPr>
+        <p:spPr/>
+      </p:sp>
+    </p:spTree>
+  </p:cSld>
+  <p:clrMapOvr>
+    <a:masterClrMapping/>
+  </p:clrMapOvr>
+</p:notes>
+</file>
+
+<file path=ppt/notesSlides/notesSlide6.xml><?xml version="1.0" encoding="utf-8"?>
+<p:notes xmlns:a="http://schemas.openxmlformats.org/drawingml/2006/main" xmlns:p="http://schemas.openxmlformats.org/presentationml/2006/main" xmlns:r="http://schemas.openxmlformats.org/officeDocument/2006/relationships">
+  <p:cSld>
+    <p:spTree>
+      <p:nvGrpSpPr>
+        <p:cNvPr id="1" name=""/>
+        <p:cNvGrpSpPr/>
+        <p:nvPr/>
+      </p:nvGrpSpPr>
+      <p:grpSpPr>
+        <a:xfrm>
+          <a:off x="0" y="0"/>
+          <a:ext cx="0" cy="0"/>
+          <a:chOff x="0" y="0"/>
+          <a:chExt cx="0" cy="0"/>
+        </a:xfrm>
+      </p:grpSpPr>
+      <p:sp>
+        <p:nvSpPr>
+          <p:cNvPr id="2" name="Slide Image Placeholder 1"/>
+          <p:cNvSpPr>
+            <a:spLocks noGrp="1"/>
+          </p:cNvSpPr>
+          <p:nvPr>
+            <p:ph type="sldImg" idx="2"/>
+          </p:nvPr>
+        </p:nvSpPr>
+        <p:spPr/>
+      </p:sp>
+      <p:sp>
+        <p:nvSpPr>
+          <p:cNvPr id="3" name="Notes Placeholder 2"/>
+          <p:cNvSpPr>
+            <a:spLocks noGrp="1"/>
+          </p:cNvSpPr>
+          <p:nvPr>
+            <p:ph type="body" idx="3" sz="quarter"/>
+          </p:nvPr>
+        </p:nvSpPr>
+        <p:spPr/>
+        <p:txBody>
+          <a:bodyPr/>
+          <a:lstStyle/>
+          <a:p>
+            <a:r>
+              <a:t>ছয়টা সারি পড়বেন না — শেষ কলামটাই আসল।</a:t>
+            </a:r>
+          </a:p>
+          <a:p>
+            <a:r>
+              <a:t>বলুন: "এই কাজগুলো SQL তৈরির নির্ভুলতা বাড়ায়। কিন্তু প্রতিটাতেই SQL-টা</a:t>
+            </a:r>
+          </a:p>
+          <a:p>
+            <a:r>
+              <a:t>শেষ পর্যন্ত মডেলই লেখে।"</a:t>
+            </a:r>
+          </a:p>
+          <a:p>
+            <a:r>
+              <a:t>PICARD আলাদা করে বলুন: "constrained decoding অবৈধ syntax আটকায়,</a:t>
+            </a:r>
+          </a:p>
+          <a:p>
+            <a:r>
+              <a:t>কিন্তু মডেল তবু SQL-ই তৈরি করে — শুধু বৈধ SQL।"</a:t>
+            </a:r>
+          </a:p>
+          <a:p>
+            <a:r>
+              <a:t>শেষ সারিতে এসে: "AEGIS-এ মডেল SQL তৈরির জায়গাতেই নেই।" </a:t>
+            </a:r>
+          </a:p>
+        </p:txBody>
+      </p:sp>
+      <p:sp>
+        <p:nvSpPr>
+          <p:cNvPr id="4" name="Slide Number Placeholder 3"/>
+          <p:cNvSpPr>
+            <a:spLocks noGrp="1"/>
+          </p:cNvSpPr>
+          <p:nvPr>
+            <p:ph type="sldNum" idx="5" sz="quarter"/>
+          </p:nvPr>
+        </p:nvSpPr>
+        <p:spPr/>
+      </p:sp>
+    </p:spTree>
+  </p:cSld>
+  <p:clrMapOvr>
+    <a:masterClrMapping/>
+  </p:clrMapOvr>
+</p:notes>
+</file>
+
+<file path=ppt/notesSlides/notesSlide7.xml><?xml version="1.0" encoding="utf-8"?>
+<p:notes xmlns:a="http://schemas.openxmlformats.org/drawingml/2006/main" xmlns:p="http://schemas.openxmlformats.org/presentationml/2006/main" xmlns:r="http://schemas.openxmlformats.org/officeDocument/2006/relationships">
+  <p:cSld>
+    <p:spTree>
+      <p:nvGrpSpPr>
+        <p:cNvPr id="1" name=""/>
+        <p:cNvGrpSpPr/>
+        <p:nvPr/>
+      </p:nvGrpSpPr>
+      <p:grpSpPr>
+        <a:xfrm>
+          <a:off x="0" y="0"/>
+          <a:ext cx="0" cy="0"/>
+          <a:chOff x="0" y="0"/>
+          <a:chExt cx="0" cy="0"/>
+        </a:xfrm>
+      </p:grpSpPr>
+      <p:sp>
+        <p:nvSpPr>
+          <p:cNvPr id="2" name="Slide Image Placeholder 1"/>
+          <p:cNvSpPr>
+            <a:spLocks noGrp="1"/>
+          </p:cNvSpPr>
+          <p:nvPr>
+            <p:ph type="sldImg" idx="2"/>
+          </p:nvPr>
+        </p:nvSpPr>
+        <p:spPr/>
+      </p:sp>
+      <p:sp>
+        <p:nvSpPr>
+          <p:cNvPr id="3" name="Notes Placeholder 2"/>
+          <p:cNvSpPr>
+            <a:spLocks noGrp="1"/>
+          </p:cNvSpPr>
+          <p:nvPr>
+            <p:ph type="body" idx="3" sz="quarter"/>
+          </p:nvPr>
+        </p:nvSpPr>
+        <p:spPr/>
+        <p:txBody>
+          <a:bodyPr/>
+          <a:lstStyle/>
+          <a:p>
+            <a:r>
+              <a:t>সংক্ষেপে, তিন বাক্য।</a:t>
+            </a:r>
+          </a:p>
+          <a:p>
+            <a:r>
+              <a:t>"অনেকে SQL-এর নির্ভুলতা বাড়িয়েছেন, কিন্তু লেখার অধিকার মডেলের কাছেই।"</a:t>
+            </a:r>
+          </a:p>
+          <a:p>
+            <a:r>
+              <a:t>"Syntax ঠিক মানেই নিরাপদ বা অর্থে সঠিক নয়।"</a:t>
+            </a:r>
+          </a:p>
+          <a:p>
+            <a:r>
+              <a:t>"যা দরকার — ভাষা গ্রহণ করা হবে, কিন্তু executable SQL আসবে শুধু একটা স্পষ্ট</a:t>
+            </a:r>
+          </a:p>
+          <a:p>
+            <a:r>
+              <a:t>semantic layer আর deterministic compiler থেকে। সেটাই এই কাজ।" </a:t>
+            </a:r>
+          </a:p>
+        </p:txBody>
+      </p:sp>
+      <p:sp>
+        <p:nvSpPr>
+          <p:cNvPr id="4" name="Slide Number Placeholder 3"/>
+          <p:cNvSpPr>
+            <a:spLocks noGrp="1"/>
+          </p:cNvSpPr>
+          <p:nvPr>
+            <p:ph type="sldNum" idx="5" sz="quarter"/>
+          </p:nvPr>
+        </p:nvSpPr>
+        <p:spPr/>
+      </p:sp>
+    </p:spTree>
+  </p:cSld>
+  <p:clrMapOvr>
+    <a:masterClrMapping/>
+  </p:clrMapOvr>
+</p:notes>
+</file>
+
+<file path=ppt/notesSlides/notesSlide8.xml><?xml version="1.0" encoding="utf-8"?>
+<p:notes xmlns:a="http://schemas.openxmlformats.org/drawingml/2006/main" xmlns:p="http://schemas.openxmlformats.org/presentationml/2006/main" xmlns:r="http://schemas.openxmlformats.org/officeDocument/2006/relationships">
+  <p:cSld>
+    <p:spTree>
+      <p:nvGrpSpPr>
+        <p:cNvPr id="1" name=""/>
+        <p:cNvGrpSpPr/>
+        <p:nvPr/>
+      </p:nvGrpSpPr>
+      <p:grpSpPr>
+        <a:xfrm>
+          <a:off x="0" y="0"/>
+          <a:ext cx="0" cy="0"/>
+          <a:chOff x="0" y="0"/>
+          <a:chExt cx="0" cy="0"/>
+        </a:xfrm>
+      </p:grpSpPr>
+      <p:sp>
+        <p:nvSpPr>
+          <p:cNvPr id="2" name="Slide Image Placeholder 1"/>
+          <p:cNvSpPr>
+            <a:spLocks noGrp="1"/>
+          </p:cNvSpPr>
+          <p:nvPr>
+            <p:ph type="sldImg" idx="2"/>
+          </p:nvPr>
+        </p:nvSpPr>
+        <p:spPr/>
+      </p:sp>
+      <p:sp>
+        <p:nvSpPr>
+          <p:cNvPr id="3" name="Notes Placeholder 2"/>
+          <p:cNvSpPr>
+            <a:spLocks noGrp="1"/>
+          </p:cNvSpPr>
+          <p:nvPr>
+            <p:ph type="body" idx="3" sz="quarter"/>
+          </p:nvPr>
+        </p:nvSpPr>
+        <p:spPr/>
+        <p:txBody>
+          <a:bodyPr/>
+          <a:lstStyle/>
+          <a:p>
+            <a:r>
+              <a:t>চারটা সারি, প্রতিটায় এক বাক্য।</a:t>
+            </a:r>
+          </a:p>
+          <a:p>
+            <a:r>
+              <a:t>ঝুঁকি কমানো — বোঝা আর চালানো আলাদা করে।</a:t>
+            </a:r>
+          </a:p>
+          <a:p>
+            <a:r>
+              <a:t>Auditable করা — সংজ্ঞাগুলো ফাইলে লেখা, কোডে লুকানো নয়।</a:t>
+            </a:r>
+          </a:p>
+          <a:p>
+            <a:r>
+              <a:t>বাস্তব রিপোর্ট — nopCommerce-এ চালিয়ে দেখানো।</a:t>
+            </a:r>
+          </a:p>
+          <a:p>
+            <a:r>
+              <a:t>স্বাধীন oracle-এ মাপা — এটায় জোর দিন, কারণ পরের অংশে এটাই ফিরে আসবে।</a:t>
+            </a:r>
+          </a:p>
+        </p:txBody>
+      </p:sp>
+      <p:sp>
+        <p:nvSpPr>
+          <p:cNvPr id="4" name="Slide Number Placeholder 3"/>
+          <p:cNvSpPr>
+            <a:spLocks noGrp="1"/>
+          </p:cNvSpPr>
+          <p:nvPr>
+            <p:ph type="sldNum" idx="5" sz="quarter"/>
+          </p:nvPr>
+        </p:nvSpPr>
+        <p:spPr/>
+      </p:sp>
+    </p:spTree>
+  </p:cSld>
+  <p:clrMapOvr>
+    <a:masterClrMapping/>
+  </p:clrMapOvr>
+</p:notes>
+</file>
+
+<file path=ppt/notesSlides/notesSlide9.xml><?xml version="1.0" encoding="utf-8"?>
+<p:notes xmlns:a="http://schemas.openxmlformats.org/drawingml/2006/main" xmlns:p="http://schemas.openxmlformats.org/presentationml/2006/main" xmlns:r="http://schemas.openxmlformats.org/officeDocument/2006/relationships">
+  <p:cSld>
+    <p:spTree>
+      <p:nvGrpSpPr>
+        <p:cNvPr id="1" name=""/>
+        <p:cNvGrpSpPr/>
+        <p:nvPr/>
+      </p:nvGrpSpPr>
+      <p:grpSpPr>
+        <a:xfrm>
+          <a:off x="0" y="0"/>
+          <a:ext cx="0" cy="0"/>
+          <a:chOff x="0" y="0"/>
+          <a:chExt cx="0" cy="0"/>
+        </a:xfrm>
+      </p:grpSpPr>
+      <p:sp>
+        <p:nvSpPr>
+          <p:cNvPr id="2" name="Slide Image Placeholder 1"/>
+          <p:cNvSpPr>
+            <a:spLocks noGrp="1"/>
+          </p:cNvSpPr>
+          <p:nvPr>
+            <p:ph type="sldImg" idx="2"/>
+          </p:nvPr>
+        </p:nvSpPr>
+        <p:spPr/>
+      </p:sp>
+      <p:sp>
+        <p:nvSpPr>
+          <p:cNvPr id="3" name="Notes Placeholder 2"/>
+          <p:cNvSpPr>
+            <a:spLocks noGrp="1"/>
+          </p:cNvSpPr>
+          <p:nvPr>
+            <p:ph type="body" idx="3" sz="quarter"/>
+          </p:nvPr>
+        </p:nvSpPr>
+        <p:spPr/>
+        <p:txBody>
+          <a:bodyPr/>
+          <a:lstStyle/>
+          <a:p>
+            <a:r>
+              <a:t>Design Science Research — চক্রটা দেখিয়ে বলুন।</a:t>
+            </a:r>
+          </a:p>
+          <a:p>
+            <a:r>
+              <a:t>"সমস্যা চিহ্নিত করা, আর্টিফ্যাক্ট ডিজাইন, প্রদর্শন, মূল্যায়ন — আর মূল্যায়ন</a:t>
+            </a:r>
+          </a:p>
+          <a:p>
+            <a:r>
+              <a:t>থেকে শেখা জিনিস ডিজাইনে ফিরে গেছে।"</a:t>
+            </a:r>
+          </a:p>
+          <a:p>
+            <a:r>
+              <a:t>একটা উদাহরণ দিন: "যেমন differential টেস্টে ধরা পড়েছিল order-লেভেলের যোগফল</a:t>
+            </a:r>
+          </a:p>
+          <a:p>
+            <a:r>
+              <a:t>line item-এ ছড়িয়ে যাচ্ছে — সেটা compiler-এ ফিরে গিয়ে ঠিক হয়েছে।"</a:t>
+            </a:r>
+          </a:p>
+          <a:p>
+            <a:r>
+              <a:t>এতে চক্রটা কাগুজে না থেকে বাস্তব শোনায়।</a:t>
             </a:r>
           </a:p>
         </p:txBody>
@@ -4716,7 +7697,7 @@
           <p:nvPr/>
         </p:nvPicPr>
         <p:blipFill>
-          <a:blip r:embed="rId3"/>
+          <a:blip r:embed="rId4"/>
           <a:stretch>
             <a:fillRect/>
           </a:stretch>
@@ -5103,7 +8084,7 @@
           <p:nvPr/>
         </p:nvPicPr>
         <p:blipFill>
-          <a:blip r:embed="rId3"/>
+          <a:blip r:embed="rId4"/>
           <a:stretch>
             <a:fillRect/>
           </a:stretch>
@@ -12113,7 +15094,7 @@
           <p:nvPr/>
         </p:nvPicPr>
         <p:blipFill>
-          <a:blip r:embed="rId3"/>
+          <a:blip r:embed="rId4"/>
           <a:stretch>
             <a:fillRect/>
           </a:stretch>
@@ -29687,7 +32668,7 @@
           <p:nvPr/>
         </p:nvPicPr>
         <p:blipFill>
-          <a:blip r:embed="rId3"/>
+          <a:blip r:embed="rId4"/>
           <a:stretch>
             <a:fillRect/>
           </a:stretch>

--- a/docs/scripts/Md_Riaz_Final_Defense_0322310105101024.pptx
+++ b/docs/scripts/Md_Riaz_Final_Defense_0322310105101024.pptx
@@ -3221,7 +3221,17 @@
           <a:lstStyle/>
           <a:p>
             <a:r>
-              <a:t>ছয়টা সারি পড়বেন না — শেষ কলামটাই আসল।</a:t>
+              <a:t>পাঁচটা সারি এক এক করে পড়বেন না — "Gap for AEGIS" কলামটাই আসল।</a:t>
+            </a:r>
+          </a:p>
+          <a:p>
+            <a:r>
+              <a:t>এগুলো প্রতিটা গবেষণা-ঘরানার একটা করে প্রতিনিধি; পূর্ণ পর্যালোচনা থিসিসের</a:t>
+            </a:r>
+          </a:p>
+          <a:p>
+            <a:r>
+              <a:t>Chapter 2-তে (১১টা সিস্টেম, ১৬টা রেফারেন্স)।</a:t>
             </a:r>
           </a:p>
           <a:p>
@@ -3236,17 +3246,22 @@
           </a:p>
           <a:p>
             <a:r>
-              <a:t>PICARD আলাদা করে বলুন: "constrained decoding অবৈধ syntax আটকায়,</a:t>
-            </a:r>
-          </a:p>
-          <a:p>
-            <a:r>
-              <a:t>কিন্তু মডেল তবু SQL-ই তৈরি করে — শুধু বৈধ SQL।"</a:t>
-            </a:r>
-          </a:p>
-          <a:p>
-            <a:r>
-              <a:t>শেষ সারিতে এসে: "AEGIS-এ মডেল SQL তৈরির জায়গাতেই নেই।" </a:t>
+              <a:t>PICARD আলাদা করে বলুন: "এটা benchmark নয়, constrained decoding —</a:t>
+            </a:r>
+          </a:p>
+          <a:p>
+            <a:r>
+              <a:t>অবৈধ syntax আটকায়, কিন্তু মডেল তবু SQL-ই তৈরি করে, শুধু বৈধ SQL।"</a:t>
+            </a:r>
+          </a:p>
+          <a:p>
+            <a:r>
+              <a:t>পরের স্লাইডে সেতু: "এই ফাঁকটাই AEGIS পূরণ করে — মডেলকে SQL তৈরির</a:t>
+            </a:r>
+          </a:p>
+          <a:p>
+            <a:r>
+              <a:t>জায়গাতেই রাখে না।" </a:t>
             </a:r>
           </a:p>
         </p:txBody>
@@ -7014,7 +7029,7 @@
         </p:nvSpPr>
         <p:spPr>
           <a:xfrm>
-            <a:off x="3282222" y="5504688"/>
+            <a:off x="3282222" y="5285232"/>
             <a:ext cx="5627553" cy="420624"/>
           </a:xfrm>
           <a:prstGeom prst="rect">
@@ -7093,7 +7108,7 @@
         </p:nvSpPr>
         <p:spPr>
           <a:xfrm>
-            <a:off x="1527048" y="3712463"/>
+            <a:off x="1527048" y="3639312"/>
             <a:ext cx="3886200" cy="365760"/>
           </a:xfrm>
           <a:prstGeom prst="rect">
@@ -7107,7 +7122,7 @@
           </a:bodyPr>
           <a:lstStyle/>
           <a:p>
-            <a:pPr>
+            <a:pPr algn="l">
               <a:defRPr sz="1600" i="1">
                 <a:latin typeface="Times New Roman"/>
               </a:defRPr>
@@ -7127,7 +7142,7 @@
         </p:nvSpPr>
         <p:spPr>
           <a:xfrm>
-            <a:off x="1527048" y="4041648"/>
+            <a:off x="1527048" y="3968496"/>
             <a:ext cx="3886200" cy="1463040"/>
           </a:xfrm>
           <a:prstGeom prst="rect">
@@ -7234,7 +7249,7 @@
         </p:nvSpPr>
         <p:spPr>
           <a:xfrm>
-            <a:off x="7269480" y="3712463"/>
+            <a:off x="7269480" y="3639312"/>
             <a:ext cx="3886200" cy="365760"/>
           </a:xfrm>
           <a:prstGeom prst="rect">
@@ -7248,7 +7263,7 @@
           </a:bodyPr>
           <a:lstStyle/>
           <a:p>
-            <a:pPr>
+            <a:pPr algn="l">
               <a:defRPr sz="1600" i="1">
                 <a:latin typeface="Times New Roman"/>
               </a:defRPr>
@@ -7268,7 +7283,7 @@
         </p:nvSpPr>
         <p:spPr>
           <a:xfrm>
-            <a:off x="7269480" y="4041648"/>
+            <a:off x="7269480" y="3968496"/>
             <a:ext cx="3886200" cy="1463040"/>
           </a:xfrm>
           <a:prstGeom prst="rect">
@@ -10076,7 +10091,7 @@
         <p:spPr>
           <a:xfrm>
             <a:off x="713232" y="2118969"/>
-            <a:ext cx="4937760" cy="2503424"/>
+            <a:ext cx="5166360" cy="2503424"/>
           </a:xfrm>
           <a:prstGeom prst="rect">
             <a:avLst/>
@@ -10138,7 +10153,7 @@
             </a:pPr>
             <a:r>
               <a:rPr/>
-              <a:t>    intent_class:    IntentClass      # required, 11-value enum</a:t>
+              <a:t>    intent_class:   IntentClass    # required, 11-enum</a:t>
             </a:r>
           </a:p>
           <a:p>
@@ -10155,7 +10170,7 @@
             </a:pPr>
             <a:r>
               <a:rPr/>
-              <a:t>    metric_term:     Optional[str]    # an approved metric id</a:t>
+              <a:t>    metric_term:    Optional[str]  # metric id</a:t>
             </a:r>
           </a:p>
           <a:p>
@@ -10172,7 +10187,7 @@
             </a:pPr>
             <a:r>
               <a:rPr/>
-              <a:t>    dimension_term:  Optional[str]    # an approved dimension id</a:t>
+              <a:t>    dimension_term: Optional[str]  # dimension id</a:t>
             </a:r>
           </a:p>
           <a:p>
@@ -10189,7 +10204,7 @@
             </a:pPr>
             <a:r>
               <a:rPr/>
-              <a:t>    time_term:       Optional[str]    # a phrase, not a date</a:t>
+              <a:t>    time_term:      Optional[str]  # phrase, not date</a:t>
             </a:r>
           </a:p>
           <a:p>
@@ -10206,7 +10221,7 @@
             </a:pPr>
             <a:r>
               <a:rPr/>
-              <a:t>    filters:         List[Filter]     # field / operator / value</a:t>
+              <a:t>    filters:        List[Filter]   # field/op/value</a:t>
             </a:r>
           </a:p>
           <a:p>
@@ -10223,7 +10238,7 @@
             </a:pPr>
             <a:r>
               <a:rPr/>
-              <a:t>    limit:           Optional[int]</a:t>
+              <a:t>    limit:          Optional[int]</a:t>
             </a:r>
           </a:p>
           <a:p>
@@ -10240,7 +10255,7 @@
             </a:pPr>
             <a:r>
               <a:rPr/>
-              <a:t>    confidence:      Confidence = LOW # absence is not confidence</a:t>
+              <a:t>    confidence:     Confidence=LOW # absence != high</a:t>
             </a:r>
           </a:p>
           <a:p>
@@ -10257,7 +10272,7 @@
             </a:pPr>
             <a:r>
               <a:rPr/>
-              <a:t>    unmapped_terms:  List[str]        # what it could not account for</a:t>
+              <a:t>    unmapped_terms: List[str]      # unmatched words</a:t>
             </a:r>
           </a:p>
           <a:p>
@@ -10287,7 +10302,7 @@
             </a:pPr>
             <a:r>
               <a:rPr/>
-              <a:t># There is no sql field. The type cannot express one.</a:t>
+              <a:t># No sql field. The type cannot express one.</a:t>
             </a:r>
           </a:p>
         </p:txBody>
@@ -21851,7 +21866,7 @@
         </p:nvGraphicFramePr>
         <p:xfrm>
           <a:off x="822960" y="1572768"/>
-          <a:ext cx="10561320" cy="4041648"/>
+          <a:ext cx="10561320" cy="3681663"/>
         </p:xfrm>
         <a:graphic>
           <a:graphicData uri="http://schemas.openxmlformats.org/drawingml/2006/table">
@@ -21864,7 +21879,7 @@
                 <a:gridCol w="3657600"/>
                 <a:gridCol w="4251960"/>
               </a:tblGrid>
-              <a:tr h="832104">
+              <a:tr h="768096">
                 <a:tc>
                   <a:txBody>
                     <a:bodyPr/>
@@ -21947,7 +21962,7 @@
                   </a:tcPr>
                 </a:tc>
               </a:tr>
-              <a:tr h="832104">
+              <a:tr h="768096">
                 <a:tc>
                   <a:txBody>
                     <a:bodyPr/>
@@ -22018,7 +22033,7 @@
                   <a:tcPr marL="54864" marR="54864" marT="22860" marB="22860" anchor="ctr"/>
                 </a:tc>
               </a:tr>
-              <a:tr h="832104">
+              <a:tr h="768096">
                 <a:tc>
                   <a:txBody>
                     <a:bodyPr/>
@@ -22101,7 +22116,7 @@
                   </a:tcPr>
                 </a:tc>
               </a:tr>
-              <a:tr h="832104">
+              <a:tr h="768096">
                 <a:tc>
                   <a:txBody>
                     <a:bodyPr/>
@@ -22172,7 +22187,7 @@
                   <a:tcPr marL="54864" marR="54864" marT="22860" marB="22860" anchor="ctr"/>
                 </a:tc>
               </a:tr>
-              <a:tr h="832104">
+              <a:tr h="768096">
                 <a:tc>
                   <a:txBody>
                     <a:bodyPr/>
@@ -22267,8 +22282,8 @@
         </p:nvSpPr>
         <p:spPr>
           <a:xfrm>
-            <a:off x="960120" y="5614416"/>
-            <a:ext cx="10149840" cy="621792"/>
+            <a:off x="960120" y="5710256"/>
+            <a:ext cx="10149840" cy="525951"/>
           </a:xfrm>
           <a:prstGeom prst="rect">
             <a:avLst/>
@@ -30399,7 +30414,7 @@
                 <a:gridCol w="2926080"/>
                 <a:gridCol w="3520440"/>
               </a:tblGrid>
-              <a:tr h="624404">
+              <a:tr h="728472">
                 <a:tc>
                   <a:txBody>
                     <a:bodyPr/>
@@ -30509,7 +30524,7 @@
                   </a:tcPr>
                 </a:tc>
               </a:tr>
-              <a:tr h="624404">
+              <a:tr h="728472">
                 <a:tc>
                   <a:txBody>
                     <a:bodyPr/>
@@ -30603,7 +30618,7 @@
                   <a:tcPr marL="36576" marR="36576" marT="13716" marB="13716" anchor="ctr"/>
                 </a:tc>
               </a:tr>
-              <a:tr h="624404">
+              <a:tr h="728472">
                 <a:tc>
                   <a:txBody>
                     <a:bodyPr/>
@@ -30713,7 +30728,7 @@
                   </a:tcPr>
                 </a:tc>
               </a:tr>
-              <a:tr h="624404">
+              <a:tr h="728472">
                 <a:tc>
                   <a:txBody>
                     <a:bodyPr/>
@@ -30807,7 +30822,7 @@
                   <a:tcPr marL="36576" marR="36576" marT="13716" marB="13716" anchor="ctr"/>
                 </a:tc>
               </a:tr>
-              <a:tr h="624404">
+              <a:tr h="728472">
                 <a:tc>
                   <a:txBody>
                     <a:bodyPr/>
@@ -30917,7 +30932,7 @@
                   </a:tcPr>
                 </a:tc>
               </a:tr>
-              <a:tr h="624404">
+              <a:tr h="728472">
                 <a:tc>
                   <a:txBody>
                     <a:bodyPr/>
@@ -31009,116 +31024,6 @@
                     </a:p>
                   </a:txBody>
                   <a:tcPr marL="36576" marR="36576" marT="13716" marB="13716" anchor="ctr"/>
-                </a:tc>
-              </a:tr>
-              <a:tr h="624408">
-                <a:tc>
-                  <a:txBody>
-                    <a:bodyPr/>
-                    <a:lstStyle/>
-                    <a:p>
-                      <a:pPr algn="l">
-                        <a:lnSpc>
-                          <a:spcPct val="100000"/>
-                        </a:lnSpc>
-                        <a:defRPr sz="1200" b="1">
-                          <a:solidFill>
-                            <a:srgbClr val="333333"/>
-                          </a:solidFill>
-                          <a:latin typeface="Times New Roman"/>
-                        </a:defRPr>
-                      </a:pPr>
-                      <a:r>
-                        <a:t>AEGIS</a:t>
-                      </a:r>
-                    </a:p>
-                  </a:txBody>
-                  <a:tcPr marL="36576" marR="36576" marT="13716" marB="13716" anchor="ctr">
-                    <a:solidFill>
-                      <a:srgbClr val="F2F4F8"/>
-                    </a:solidFill>
-                  </a:tcPr>
-                </a:tc>
-                <a:tc>
-                  <a:txBody>
-                    <a:bodyPr/>
-                    <a:lstStyle/>
-                    <a:p>
-                      <a:pPr algn="l">
-                        <a:lnSpc>
-                          <a:spcPct val="100000"/>
-                        </a:lnSpc>
-                        <a:defRPr sz="1200" b="0">
-                          <a:solidFill>
-                            <a:srgbClr val="333333"/>
-                          </a:solidFill>
-                          <a:latin typeface="Times New Roman"/>
-                        </a:defRPr>
-                      </a:pPr>
-                      <a:r>
-                        <a:t>Safe NL analytics</a:t>
-                      </a:r>
-                    </a:p>
-                  </a:txBody>
-                  <a:tcPr marL="36576" marR="36576" marT="13716" marB="13716" anchor="ctr">
-                    <a:solidFill>
-                      <a:srgbClr val="F2F4F8"/>
-                    </a:solidFill>
-                  </a:tcPr>
-                </a:tc>
-                <a:tc>
-                  <a:txBody>
-                    <a:bodyPr/>
-                    <a:lstStyle/>
-                    <a:p>
-                      <a:pPr algn="l">
-                        <a:lnSpc>
-                          <a:spcPct val="100000"/>
-                        </a:lnSpc>
-                        <a:defRPr sz="1200" b="0">
-                          <a:solidFill>
-                            <a:srgbClr val="333333"/>
-                          </a:solidFill>
-                          <a:latin typeface="Times New Roman"/>
-                        </a:defRPr>
-                      </a:pPr>
-                      <a:r>
-                        <a:t>Intent extraction only; SQL compiled from semantic layer</a:t>
-                      </a:r>
-                    </a:p>
-                  </a:txBody>
-                  <a:tcPr marL="36576" marR="36576" marT="13716" marB="13716" anchor="ctr">
-                    <a:solidFill>
-                      <a:srgbClr val="F2F4F8"/>
-                    </a:solidFill>
-                  </a:tcPr>
-                </a:tc>
-                <a:tc>
-                  <a:txBody>
-                    <a:bodyPr/>
-                    <a:lstStyle/>
-                    <a:p>
-                      <a:pPr algn="l">
-                        <a:lnSpc>
-                          <a:spcPct val="100000"/>
-                        </a:lnSpc>
-                        <a:defRPr sz="1200" b="0">
-                          <a:solidFill>
-                            <a:srgbClr val="333333"/>
-                          </a:solidFill>
-                          <a:latin typeface="Times New Roman"/>
-                        </a:defRPr>
-                      </a:pPr>
-                      <a:r>
-                        <a:t>Trades open SQL for auditable analytics intent validation</a:t>
-                      </a:r>
-                    </a:p>
-                  </a:txBody>
-                  <a:tcPr marL="36576" marR="36576" marT="13716" marB="13716" anchor="ctr">
-                    <a:solidFill>
-                      <a:srgbClr val="F2F4F8"/>
-                    </a:solidFill>
-                  </a:tcPr>
                 </a:tc>
               </a:tr>
             </a:tbl>

--- a/docs/scripts/Md_Riaz_Final_Defense_0322310105101024.pptx
+++ b/docs/scripts/Md_Riaz_Final_Defense_0322310105101024.pptx
@@ -1531,7 +1531,7 @@
           </a:p>
           <a:p>
             <a:r>
-              <a:t>মিলতে হবে। grounding fuzzy matching, তাই আচরণে ৯৯.৫%।" </a:t>
+              <a:t>মিলতে হবে। শব্দ মেলানোটা আংশিক-মিল (fuzzy), তাই আচরণে ৯৯.৫%।" </a:t>
             </a:r>
           </a:p>
         </p:txBody>
@@ -2326,7 +2326,7 @@
           </a:p>
           <a:p>
             <a:r>
-              <a:t>রিপোর্টের বিপরীতে differential দিয়ে মেপে দেখানো।"</a:t>
+              <a:t>রিপোর্টের বিপরীতে রো-বাই-রো মিলিয়ে মেপে দেখানো।"</a:t>
             </a:r>
           </a:p>
           <a:p>
@@ -2426,7 +2426,7 @@
           </a:p>
           <a:p>
             <a:r>
-              <a:t>বাকিগুলো এক নিঃশ্বাসে: আরও oracle রিপোর্ট, PostgreSQL ও SQL Server,</a:t>
+              <a:t>বাকিগুলো এক নিঃশ্বাসে: আরও reference রিপোর্ট, PostgreSQL ও SQL Server,</a:t>
             </a:r>
           </a:p>
           <a:p>
@@ -3441,7 +3441,7 @@
           </a:p>
           <a:p>
             <a:r>
-              <a:t>স্বাধীন oracle-এ মাপা — এটায় জোর দিন, কারণ পরের অংশে এটাই ফিরে আসবে।</a:t>
+              <a:t>স্বাধীন reference রিপোর্টে মাপা — এটায় জোর দিন, কারণ পরের অংশে এটাই ফিরে আসবে।</a:t>
             </a:r>
           </a:p>
         </p:txBody>
@@ -3526,7 +3526,7 @@
           </a:p>
           <a:p>
             <a:r>
-              <a:t>একটা উদাহরণ দিন: "যেমন differential টেস্টে ধরা পড়েছিল order-লেভেলের যোগফল</a:t>
+              <a:t>একটা উদাহরণ দিন: "যেমন রো-বাই-রো মিলিয়ে দেখায় ধরা পড়েছিল order-লেভেলের যোগফল</a:t>
             </a:r>
           </a:p>
           <a:p>
@@ -16873,7 +16873,7 @@
                 </a:solidFill>
                 <a:latin typeface="Times New Roman"/>
               </a:rPr>
-              <a:t>425 questions the semantic layer should answer, 75 realistic e-commerce questions it should decline. The same corpus is executed two ways, and they answer different questions.</a:t>
+              <a:t>425 questions the semantic layer should answer, 75 realistic e-commerce questions it should decline. The same question set is run two ways, and they answer different questions.</a:t>
             </a:r>
           </a:p>
         </p:txBody>
@@ -17259,7 +17259,7 @@
                         </a:defRPr>
                       </a:pPr>
                       <a:r>
-                        <a:t>Intent matched the annotation</a:t>
+                        <a:t>Intent matched the expected answer</a:t>
                       </a:r>
                     </a:p>
                   </a:txBody>
@@ -17448,7 +17448,7 @@
                 </a:solidFill>
                 <a:latin typeface="Times New Roman"/>
               </a:rPr>
-              <a:t> committed intent annotations are fed straight to the mapper, so it tests the compiler, not the pipeline. Only the right column is an end-to-end result, and it is the one to quote.</a:t>
+              <a:t> saved expected intents are fed straight to the mapper, so it tests the compiler, not the pipeline. Only the right column is an end-to-end result, and it is the one to quote.</a:t>
             </a:r>
           </a:p>
           <a:p>
@@ -18596,7 +18596,7 @@
                 </a:solidFill>
                 <a:latin typeface="Times New Roman"/>
               </a:rPr>
-              <a:t>Median and 95th-percentile time per question, measured on the supported questions of the 500-question corpus.</a:t>
+              <a:t>Median and 95th-percentile time per question, measured on the supported questions in the 500-question set.</a:t>
             </a:r>
           </a:p>
         </p:txBody>
@@ -23860,7 +23860,7 @@
                 </a:solidFill>
                 <a:latin typeface="Times New Roman"/>
               </a:rPr>
-              <a:t>- The nopCommerce [7] prototype, the 500-question corpus, and the differential against the platform's own report logic show that the approach can be implemented and evaluated practically.</a:t>
+              <a:t>- The nopCommerce [7] prototype, the 500-question set, and the row-by-row comparison against the platform's own reports show that the approach can be implemented and evaluated practically.</a:t>
             </a:r>
           </a:p>
           <a:p>
@@ -24356,7 +24356,7 @@
                 </a:solidFill>
                 <a:latin typeface="Times New Roman"/>
               </a:rPr>
-              <a:t>- Add more oracle reports from real admin and business workflows.</a:t>
+              <a:t>- Add more reference reports from real admin and business workflows.</a:t>
             </a:r>
           </a:p>
           <a:p>
@@ -32159,7 +32159,7 @@
                         </a:defRPr>
                       </a:pPr>
                       <a:r>
-                        <a:t>Evaluate against an independent oracle</a:t>
+                        <a:t>Evaluate against an independent reference</a:t>
                       </a:r>
                     </a:p>
                   </a:txBody>
@@ -32186,7 +32186,7 @@
                         </a:defRPr>
                       </a:pPr>
                       <a:r>
-                        <a:t>Measure breadth on 500 fixed natural-language questions, and fidelity against nopCommerce's own twenty admin reports.</a:t>
+                        <a:t>Measure coverage on 500 fixed natural-language questions, and accuracy against nopCommerce's own twenty admin reports.</a:t>
                       </a:r>
                     </a:p>
                   </a:txBody>

--- a/docs/scripts/Md_Riaz_Final_Defense_0322310105101024.pptx
+++ b/docs/scripts/Md_Riaz_Final_Defense_0322310105101024.pptx
@@ -7634,7 +7634,7 @@
               </a:defRPr>
             </a:pPr>
             <a:r>
-              <a:t>Tuesday, August 18, 2026</a:t>
+              <a:t>Saturday, November 7, 2026</a:t>
             </a:r>
           </a:p>
         </p:txBody>
@@ -8021,7 +8021,7 @@
               </a:defRPr>
             </a:pPr>
             <a:r>
-              <a:t>Tuesday, August 18, 2026</a:t>
+              <a:t>Saturday, November 7, 2026</a:t>
             </a:r>
           </a:p>
         </p:txBody>
@@ -8608,7 +8608,7 @@
               </a:defRPr>
             </a:pPr>
             <a:r>
-              <a:t>Tuesday, August 18, 2026</a:t>
+              <a:t>Saturday, November 7, 2026</a:t>
             </a:r>
           </a:p>
         </p:txBody>
@@ -9921,7 +9921,7 @@
               </a:defRPr>
             </a:pPr>
             <a:r>
-              <a:t>Tuesday, August 18, 2026</a:t>
+              <a:t>Saturday, November 7, 2026</a:t>
             </a:r>
           </a:p>
         </p:txBody>
@@ -11119,7 +11119,7 @@
               </a:defRPr>
             </a:pPr>
             <a:r>
-              <a:t>Tuesday, August 18, 2026</a:t>
+              <a:t>Saturday, November 7, 2026</a:t>
             </a:r>
           </a:p>
         </p:txBody>
@@ -12435,7 +12435,7 @@
               </a:defRPr>
             </a:pPr>
             <a:r>
-              <a:t>Tuesday, August 18, 2026</a:t>
+              <a:t>Saturday, November 7, 2026</a:t>
             </a:r>
           </a:p>
         </p:txBody>
@@ -13678,7 +13678,7 @@
               </a:defRPr>
             </a:pPr>
             <a:r>
-              <a:t>Tuesday, August 18, 2026</a:t>
+              <a:t>Saturday, November 7, 2026</a:t>
             </a:r>
           </a:p>
         </p:txBody>
@@ -15031,7 +15031,7 @@
               </a:defRPr>
             </a:pPr>
             <a:r>
-              <a:t>Tuesday, August 18, 2026</a:t>
+              <a:t>Saturday, November 7, 2026</a:t>
             </a:r>
           </a:p>
         </p:txBody>
@@ -15609,7 +15609,7 @@
               </a:defRPr>
             </a:pPr>
             <a:r>
-              <a:t>Tuesday, August 18, 2026</a:t>
+              <a:t>Saturday, November 7, 2026</a:t>
             </a:r>
           </a:p>
         </p:txBody>
@@ -16764,7 +16764,7 @@
               </a:defRPr>
             </a:pPr>
             <a:r>
-              <a:t>Tuesday, August 18, 2026</a:t>
+              <a:t>Saturday, November 7, 2026</a:t>
             </a:r>
           </a:p>
         </p:txBody>
@@ -17841,7 +17841,7 @@
               </a:defRPr>
             </a:pPr>
             <a:r>
-              <a:t>Tuesday, August 18, 2026</a:t>
+              <a:t>Saturday, November 7, 2026</a:t>
             </a:r>
           </a:p>
         </p:txBody>
@@ -18487,7 +18487,7 @@
               </a:defRPr>
             </a:pPr>
             <a:r>
-              <a:t>Tuesday, August 18, 2026</a:t>
+              <a:t>Saturday, November 7, 2026</a:t>
             </a:r>
           </a:p>
         </p:txBody>
@@ -19602,7 +19602,7 @@
               </a:defRPr>
             </a:pPr>
             <a:r>
-              <a:t>Tuesday, August 18, 2026</a:t>
+              <a:t>Saturday, November 7, 2026</a:t>
             </a:r>
           </a:p>
         </p:txBody>
@@ -20698,7 +20698,7 @@
               </a:defRPr>
             </a:pPr>
             <a:r>
-              <a:t>Tuesday, August 18, 2026</a:t>
+              <a:t>Saturday, November 7, 2026</a:t>
             </a:r>
           </a:p>
         </p:txBody>
@@ -21787,7 +21787,7 @@
               </a:defRPr>
             </a:pPr>
             <a:r>
-              <a:t>Tuesday, August 18, 2026</a:t>
+              <a:t>Saturday, November 7, 2026</a:t>
             </a:r>
           </a:p>
         </p:txBody>
@@ -22622,7 +22622,7 @@
               </a:defRPr>
             </a:pPr>
             <a:r>
-              <a:t>Tuesday, August 18, 2026</a:t>
+              <a:t>Saturday, November 7, 2026</a:t>
             </a:r>
           </a:p>
         </p:txBody>
@@ -23149,7 +23149,7 @@
               </a:defRPr>
             </a:pPr>
             <a:r>
-              <a:t>Tuesday, August 18, 2026</a:t>
+              <a:t>Saturday, November 7, 2026</a:t>
             </a:r>
           </a:p>
         </p:txBody>
@@ -23663,7 +23663,7 @@
               </a:defRPr>
             </a:pPr>
             <a:r>
-              <a:t>Tuesday, August 18, 2026</a:t>
+              <a:t>Saturday, November 7, 2026</a:t>
             </a:r>
           </a:p>
         </p:txBody>
@@ -24203,7 +24203,7 @@
               </a:defRPr>
             </a:pPr>
             <a:r>
-              <a:t>Tuesday, August 18, 2026</a:t>
+              <a:t>Saturday, November 7, 2026</a:t>
             </a:r>
           </a:p>
         </p:txBody>
@@ -24721,7 +24721,7 @@
               </a:defRPr>
             </a:pPr>
             <a:r>
-              <a:t>Tuesday, August 18, 2026</a:t>
+              <a:t>Saturday, November 7, 2026</a:t>
             </a:r>
           </a:p>
         </p:txBody>
@@ -25240,7 +25240,7 @@
               </a:defRPr>
             </a:pPr>
             <a:r>
-              <a:t>Tuesday, August 18, 2026</a:t>
+              <a:t>Saturday, November 7, 2026</a:t>
             </a:r>
           </a:p>
         </p:txBody>
@@ -25654,7 +25654,7 @@
               </a:defRPr>
             </a:pPr>
             <a:r>
-              <a:t>Tuesday, August 18, 2026</a:t>
+              <a:t>Saturday, November 7, 2026</a:t>
             </a:r>
           </a:p>
         </p:txBody>
@@ -26260,7 +26260,7 @@
               </a:defRPr>
             </a:pPr>
             <a:r>
-              <a:t>Tuesday, August 18, 2026</a:t>
+              <a:t>Saturday, November 7, 2026</a:t>
             </a:r>
           </a:p>
         </p:txBody>
@@ -27234,7 +27234,7 @@
               </a:defRPr>
             </a:pPr>
             <a:r>
-              <a:t>Tuesday, August 18, 2026</a:t>
+              <a:t>Saturday, November 7, 2026</a:t>
             </a:r>
           </a:p>
         </p:txBody>
@@ -27951,7 +27951,7 @@
               </a:defRPr>
             </a:pPr>
             <a:r>
-              <a:t>Tuesday, August 18, 2026</a:t>
+              <a:t>Saturday, November 7, 2026</a:t>
             </a:r>
           </a:p>
         </p:txBody>
@@ -28722,7 +28722,7 @@
               </a:defRPr>
             </a:pPr>
             <a:r>
-              <a:t>Tuesday, August 18, 2026</a:t>
+              <a:t>Saturday, November 7, 2026</a:t>
             </a:r>
           </a:p>
         </p:txBody>
@@ -29262,7 +29262,7 @@
               </a:defRPr>
             </a:pPr>
             <a:r>
-              <a:t>Tuesday, August 18, 2026</a:t>
+              <a:t>Saturday, November 7, 2026</a:t>
             </a:r>
           </a:p>
         </p:txBody>
@@ -30321,7 +30321,7 @@
               </a:defRPr>
             </a:pPr>
             <a:r>
-              <a:t>Tuesday, August 18, 2026</a:t>
+              <a:t>Saturday, November 7, 2026</a:t>
             </a:r>
           </a:p>
         </p:txBody>
@@ -31324,7 +31324,7 @@
               </a:defRPr>
             </a:pPr>
             <a:r>
-              <a:t>Tuesday, August 18, 2026</a:t>
+              <a:t>Saturday, November 7, 2026</a:t>
             </a:r>
           </a:p>
         </p:txBody>
@@ -31842,7 +31842,7 @@
               </a:defRPr>
             </a:pPr>
             <a:r>
-              <a:t>Tuesday, August 18, 2026</a:t>
+              <a:t>Saturday, November 7, 2026</a:t>
             </a:r>
           </a:p>
         </p:txBody>
@@ -32495,7 +32495,7 @@
               </a:defRPr>
             </a:pPr>
             <a:r>
-              <a:t>Tuesday, August 18, 2026</a:t>
+              <a:t>Saturday, November 7, 2026</a:t>
             </a:r>
           </a:p>
         </p:txBody>
